--- a/03-build/pptx/C6plus_U3_docente.pptx
+++ b/03-build/pptx/C6plus_U3_docente.pptx
@@ -6660,7 +6660,6 @@
               <a:srgbClr val="E4E3DE"/>
             </a:solidFill>
           </a:ln>
-          <a:effectLst/>
           <a:effectLst>
             <a:outerShdw blurRad="90000" dist="38000" dir="5400000" rotWithShape="0">
               <a:srgbClr val="20242E">
@@ -6894,7 +6893,6 @@
               <a:srgbClr val="E4E3DE"/>
             </a:solidFill>
           </a:ln>
-          <a:effectLst/>
           <a:effectLst>
             <a:outerShdw blurRad="90000" dist="38000" dir="5400000" rotWithShape="0">
               <a:srgbClr val="20242E">
@@ -7128,7 +7126,6 @@
               <a:srgbClr val="E4E3DE"/>
             </a:solidFill>
           </a:ln>
-          <a:effectLst/>
           <a:effectLst>
             <a:outerShdw blurRad="90000" dist="38000" dir="5400000" rotWithShape="0">
               <a:srgbClr val="20242E">
@@ -7362,7 +7359,6 @@
               <a:srgbClr val="E4E3DE"/>
             </a:solidFill>
           </a:ln>
-          <a:effectLst/>
           <a:effectLst>
             <a:outerShdw blurRad="90000" dist="38000" dir="5400000" rotWithShape="0">
               <a:srgbClr val="20242E">
@@ -9341,7 +9337,6 @@
           <a:ln>
             <a:noFill/>
           </a:ln>
-          <a:effectLst/>
           <a:effectLst>
             <a:outerShdw blurRad="90000" dist="38000" dir="5400000" rotWithShape="0">
               <a:srgbClr val="20242E">
@@ -15541,7 +15536,6 @@
               <a:srgbClr val="E4E3DE"/>
             </a:solidFill>
           </a:ln>
-          <a:effectLst/>
           <a:effectLst>
             <a:outerShdw blurRad="90000" dist="38000" dir="5400000" rotWithShape="0">
               <a:srgbClr val="20242E">
@@ -16220,7 +16214,6 @@
               <a:srgbClr val="7C56A9"/>
             </a:solidFill>
           </a:ln>
-          <a:effectLst/>
           <a:effectLst>
             <a:outerShdw blurRad="90000" dist="38000" dir="5400000" rotWithShape="0">
               <a:srgbClr val="20242E">
@@ -23138,7 +23131,6 @@
               <a:srgbClr val="7C56A9"/>
             </a:solidFill>
           </a:ln>
-          <a:effectLst/>
           <a:effectLst>
             <a:outerShdw blurRad="90000" dist="38000" dir="5400000" rotWithShape="0">
               <a:srgbClr val="20242E">
@@ -23372,7 +23364,6 @@
               <a:srgbClr val="7C56A9"/>
             </a:solidFill>
           </a:ln>
-          <a:effectLst/>
           <a:effectLst>
             <a:outerShdw blurRad="90000" dist="38000" dir="5400000" rotWithShape="0">
               <a:srgbClr val="20242E">
@@ -23606,7 +23597,6 @@
               <a:srgbClr val="7C56A9"/>
             </a:solidFill>
           </a:ln>
-          <a:effectLst/>
           <a:effectLst>
             <a:outerShdw blurRad="90000" dist="38000" dir="5400000" rotWithShape="0">
               <a:srgbClr val="20242E">
@@ -28984,7 +28974,6 @@
               <a:srgbClr val="7C56A9"/>
             </a:solidFill>
           </a:ln>
-          <a:effectLst/>
           <a:effectLst>
             <a:outerShdw blurRad="90000" dist="38000" dir="5400000" rotWithShape="0">
               <a:srgbClr val="20242E">
@@ -29287,7 +29276,6 @@
               <a:srgbClr val="7C56A9"/>
             </a:solidFill>
           </a:ln>
-          <a:effectLst/>
           <a:effectLst>
             <a:outerShdw blurRad="90000" dist="38000" dir="5400000" rotWithShape="0">
               <a:srgbClr val="20242E">
@@ -29590,7 +29578,6 @@
               <a:srgbClr val="7C56A9"/>
             </a:solidFill>
           </a:ln>
-          <a:effectLst/>
           <a:effectLst>
             <a:outerShdw blurRad="90000" dist="38000" dir="5400000" rotWithShape="0">
               <a:srgbClr val="20242E">
@@ -29893,7 +29880,6 @@
               <a:srgbClr val="7C56A9"/>
             </a:solidFill>
           </a:ln>
-          <a:effectLst/>
           <a:effectLst>
             <a:outerShdw blurRad="90000" dist="38000" dir="5400000" rotWithShape="0">
               <a:srgbClr val="20242E">
@@ -30196,7 +30182,6 @@
               <a:srgbClr val="7C56A9"/>
             </a:solidFill>
           </a:ln>
-          <a:effectLst/>
           <a:effectLst>
             <a:outerShdw blurRad="90000" dist="38000" dir="5400000" rotWithShape="0">
               <a:srgbClr val="20242E">
@@ -30499,7 +30484,6 @@
               <a:srgbClr val="5B3E83"/>
             </a:solidFill>
           </a:ln>
-          <a:effectLst/>
           <a:effectLst>
             <a:outerShdw blurRad="90000" dist="38000" dir="5400000" rotWithShape="0">
               <a:srgbClr val="20242E">
@@ -30802,7 +30786,6 @@
               <a:srgbClr val="5B3E83"/>
             </a:solidFill>
           </a:ln>
-          <a:effectLst/>
           <a:effectLst>
             <a:outerShdw blurRad="90000" dist="38000" dir="5400000" rotWithShape="0">
               <a:srgbClr val="20242E">
@@ -31105,7 +31088,6 @@
               <a:srgbClr val="5B3E83"/>
             </a:solidFill>
           </a:ln>
-          <a:effectLst/>
           <a:effectLst>
             <a:outerShdw blurRad="90000" dist="38000" dir="5400000" rotWithShape="0">
               <a:srgbClr val="20242E">
@@ -31932,7 +31914,6 @@
           <a:ln>
             <a:noFill/>
           </a:ln>
-          <a:effectLst/>
           <a:effectLst>
             <a:outerShdw blurRad="90000" dist="38000" dir="5400000" rotWithShape="0">
               <a:srgbClr val="20242E">
@@ -33645,7 +33626,6 @@
           <a:ln>
             <a:noFill/>
           </a:ln>
-          <a:effectLst/>
           <a:effectLst>
             <a:outerShdw blurRad="90000" dist="38000" dir="5400000" rotWithShape="0">
               <a:srgbClr val="20242E">
@@ -33788,7 +33768,6 @@
           <a:ln>
             <a:noFill/>
           </a:ln>
-          <a:effectLst/>
           <a:effectLst>
             <a:outerShdw blurRad="90000" dist="38000" dir="5400000" rotWithShape="0">
               <a:srgbClr val="20242E">
@@ -33931,7 +33910,6 @@
           <a:ln>
             <a:noFill/>
           </a:ln>
-          <a:effectLst/>
           <a:effectLst>
             <a:outerShdw blurRad="90000" dist="38000" dir="5400000" rotWithShape="0">
               <a:srgbClr val="20242E">
@@ -34074,7 +34052,6 @@
           <a:ln>
             <a:noFill/>
           </a:ln>
-          <a:effectLst/>
           <a:effectLst>
             <a:outerShdw blurRad="90000" dist="38000" dir="5400000" rotWithShape="0">
               <a:srgbClr val="20242E">
@@ -34217,7 +34194,6 @@
           <a:ln>
             <a:noFill/>
           </a:ln>
-          <a:effectLst/>
           <a:effectLst>
             <a:outerShdw blurRad="90000" dist="38000" dir="5400000" rotWithShape="0">
               <a:srgbClr val="20242E">
@@ -38441,7 +38417,6 @@
           <a:ln>
             <a:noFill/>
           </a:ln>
-          <a:effectLst/>
           <a:effectLst>
             <a:outerShdw blurRad="90000" dist="38000" dir="5400000" rotWithShape="0">
               <a:srgbClr val="20242E">
@@ -45674,7 +45649,6 @@
           <a:ln>
             <a:noFill/>
           </a:ln>
-          <a:effectLst/>
           <a:effectLst>
             <a:outerShdw blurRad="90000" dist="38000" dir="5400000" rotWithShape="0">
               <a:srgbClr val="20242E">
@@ -45808,7 +45782,6 @@
           <a:ln>
             <a:noFill/>
           </a:ln>
-          <a:effectLst/>
           <a:effectLst>
             <a:outerShdw blurRad="90000" dist="38000" dir="5400000" rotWithShape="0">
               <a:srgbClr val="20242E">
@@ -49988,7 +49961,6 @@
               <a:srgbClr val="7C56A9"/>
             </a:solidFill>
           </a:ln>
-          <a:effectLst/>
           <a:effectLst>
             <a:outerShdw blurRad="90000" dist="38000" dir="5400000" rotWithShape="0">
               <a:srgbClr val="20242E">

--- a/03-build/pptx/C6plus_U3_docente.pptx
+++ b/03-build/pptx/C6plus_U3_docente.pptx
@@ -11,6 +11,9 @@
     <p:sldId id="259" r:id="rId11"/>
     <p:sldId id="260" r:id="rId12"/>
     <p:sldId id="261" r:id="rId13"/>
+    <p:sldId id="277" r:id="rId29"/>
+    <p:sldId id="278" r:id="rId30"/>
+    <p:sldId id="279" r:id="rId31"/>
     <p:sldId id="262" r:id="rId14"/>
     <p:sldId id="263" r:id="rId15"/>
     <p:sldId id="264" r:id="rId16"/>
@@ -1551,6 +1554,255 @@
           </p:nvPr>
         </p:nvSpPr>
         <p:spPr/>
+      </p:sp>
+    </p:spTree>
+  </p:cSld>
+  <p:clrMapOvr>
+    <a:masterClrMapping/>
+  </p:clrMapOvr>
+</p:notes>
+</file>
+
+<file path=ppt/notesSlides/notesSlide22.xml><?xml version="1.0" encoding="utf-8"?>
+<p:notes xmlns:a="http://schemas.openxmlformats.org/drawingml/2006/main" xmlns:p="http://schemas.openxmlformats.org/presentationml/2006/main" xmlns:r="http://schemas.openxmlformats.org/officeDocument/2006/relationships">
+  <p:cSld>
+    <p:spTree>
+      <p:nvGrpSpPr>
+        <p:cNvPr id="1" name=""/>
+        <p:cNvGrpSpPr/>
+        <p:nvPr/>
+      </p:nvGrpSpPr>
+      <p:grpSpPr>
+        <a:xfrm>
+          <a:off x="0" y="0"/>
+          <a:ext cx="0" cy="0"/>
+          <a:chOff x="0" y="0"/>
+          <a:chExt cx="0" cy="0"/>
+        </a:xfrm>
+      </p:grpSpPr>
+      <p:sp>
+        <p:nvSpPr>
+          <p:cNvPr id="2" name="Slide Image Placeholder 1"/>
+          <p:cNvSpPr>
+            <a:spLocks noGrp="1"/>
+          </p:cNvSpPr>
+          <p:nvPr>
+            <p:ph type="sldImg" idx="2"/>
+          </p:nvPr>
+        </p:nvSpPr>
+        <p:spPr/>
+      </p:sp>
+      <p:sp>
+        <p:nvSpPr>
+          <p:cNvPr id="3" name="Notes Placeholder 2"/>
+          <p:cNvSpPr>
+            <a:spLocks noGrp="1"/>
+          </p:cNvSpPr>
+          <p:nvPr>
+            <p:ph type="body" idx="3" sz="quarter"/>
+          </p:nvPr>
+        </p:nvSpPr>
+        <p:spPr/>
+        <p:txBody>
+          <a:bodyPr/>
+          <a:lstStyle/>
+          <a:p>
+            <a:r>
+              <a:t>RETO 2 · Detox de 24 horas — ⚖️ onderhandeling &amp; dilemma</a:t>
+            </a:r>
+          </a:p>
+          <a:p>
+            <a:r>
+              <a:t>OPDRACHT: Presenteer het plan met voy a / vamos a en antwoord de sceptici.</a:t>
+            </a:r>
+          </a:p>
+          <a:p>
+            <a:r>
+              <a:t>DE REGEL: Elk blok van de dag krijgt een «vamos a»-zin met een concrete activiteit. En je moet drie tegenwerpingen weerleggen — het plan telt pas als het de test doorstaat.</a:t>
+            </a:r>
+          </a:p>
+          <a:p>
+            <a:r>
+              <a:t>VERLOOP: Repartid el día en cinco bloques. | Cada bloque, una frase con vamos a. | Los escépticos ponen tres pegas. | Contestad. El plan gana o pierde. | La clase vota: ¿lo hacen o no?</a:t>
+            </a:r>
+          </a:p>
+          <a:p>
+            <a:r>
+              <a:t>SLEUTEL: «Vamos a» plus infinitief is de hele grammatica van §2, en de bezwaren dwingen tot hérgebruik: elk antwoord op een pega is opnieuw een «vamos a»-zin.  ||  De wekkervraag is de leukste: bijna niemand heeft nog een wekker die geen telefoon is. Daar wordt het plan concreet in plaats van principieel.  ||  De laatste pega («¿y si el plan no funciona?») is de belangrijkste: hij dwingt tot een si-zin met presente plus «vamos a» — de conditionele constructie die in dit leerplan mag.  ||  Toets de vijf blokken en de drie weerleggingen. Of de klas het écht zou doen, is bijzaak.</a:t>
+            </a:r>
+          </a:p>
+          <a:p>
+            <a:r>
+              <a:t>NOTA: Als een groep het daadwerkelijk uitprobeert, laat ze er de week erna over vertellen. Dan wordt de reto opeens een echte tarea.</a:t>
+            </a:r>
+          </a:p>
+        </p:txBody>
+      </p:sp>
+    </p:spTree>
+  </p:cSld>
+  <p:clrMapOvr>
+    <a:masterClrMapping/>
+  </p:clrMapOvr>
+</p:notes>
+</file>
+
+<file path=ppt/notesSlides/notesSlide23.xml><?xml version="1.0" encoding="utf-8"?>
+<p:notes xmlns:a="http://schemas.openxmlformats.org/drawingml/2006/main" xmlns:p="http://schemas.openxmlformats.org/presentationml/2006/main" xmlns:r="http://schemas.openxmlformats.org/officeDocument/2006/relationships">
+  <p:cSld>
+    <p:spTree>
+      <p:nvGrpSpPr>
+        <p:cNvPr id="1" name=""/>
+        <p:cNvGrpSpPr/>
+        <p:nvPr/>
+      </p:nvGrpSpPr>
+      <p:grpSpPr>
+        <a:xfrm>
+          <a:off x="0" y="0"/>
+          <a:ext cx="0" cy="0"/>
+          <a:chOff x="0" y="0"/>
+          <a:chExt cx="0" cy="0"/>
+        </a:xfrm>
+      </p:grpSpPr>
+      <p:sp>
+        <p:nvSpPr>
+          <p:cNvPr id="2" name="Slide Image Placeholder 1"/>
+          <p:cNvSpPr>
+            <a:spLocks noGrp="1"/>
+          </p:cNvSpPr>
+          <p:nvPr>
+            <p:ph type="sldImg" idx="2"/>
+          </p:nvPr>
+        </p:nvSpPr>
+        <p:spPr/>
+      </p:sp>
+      <p:sp>
+        <p:nvSpPr>
+          <p:cNvPr id="3" name="Notes Placeholder 2"/>
+          <p:cNvSpPr>
+            <a:spLocks noGrp="1"/>
+          </p:cNvSpPr>
+          <p:nvPr>
+            <p:ph type="body" idx="3" sz="quarter"/>
+          </p:nvPr>
+        </p:nvSpPr>
+        <p:spPr/>
+        <p:txBody>
+          <a:bodyPr/>
+          <a:lstStyle/>
+          <a:p>
+            <a:r>
+              <a:t>RETO 3 · El algoritmo explicado — 🤝 bemiddelen</a:t>
+            </a:r>
+          </a:p>
+          <a:p>
+            <a:r>
+              <a:t>OPDRACHT: Leg het algoritme uit in vijf zinnen, in eenvoudig Spaans en zonder anglicismen.</a:t>
+            </a:r>
+          </a:p>
+          <a:p>
+            <a:r>
+              <a:t>DE REGEL: Geen enkel Engels woord — geen algorithm, geen feed, geen like, geen data. En geen enkele zin langer dan twaalf woorden. Wat je niet kunt uitleggen, heb je niet begrepen.</a:t>
+            </a:r>
+          </a:p>
+          <a:p>
+            <a:r>
+              <a:t>VERLOOP: Escribid qué hace un algoritmo, en una frase. | Buscad una palabra española para cada anglicismo. | Explicadlo en cinco frases cortas. | Probadlo con alguien que no sepa nada.</a:t>
+            </a:r>
+          </a:p>
+          <a:p>
+            <a:r>
+              <a:t>SLEUTEL: De vijf stappen in de data zijn samen een correcte, volledige uitleg zonder één Engels woord. Toon ze pas ná de eerste poging — de klas komt er zelf verrassend dicht bij.  ||  «Cuanto más…, más…» is de constructie die de terugkoppeling uitdrukt en die op aanzet-B1 hoort. Wie hem gebruikt, heeft het mechanisme echt begrepen.  ||  «No es magia: es que…» is de sleutelzin van bemiddelen: eerst het misverstand wegnemen, dan uitleggen.  ||  Toets op begrijpelijkheid voor de gedachte grootmoeder, niet op technische juistheid. Een uitleg die klopt maar niet aankomt, is hier fout.</a:t>
+            </a:r>
+          </a:p>
+          <a:p>
+            <a:r>
+              <a:t>NOTA: Laat het echt testen op iemand buiten de klas, in het Nederlands of het Spaans. De vraag «snapte die persoon het?» is de eerlijkste beoordeling die er is.</a:t>
+            </a:r>
+          </a:p>
+        </p:txBody>
+      </p:sp>
+    </p:spTree>
+  </p:cSld>
+  <p:clrMapOvr>
+    <a:masterClrMapping/>
+  </p:clrMapOvr>
+</p:notes>
+</file>
+
+<file path=ppt/notesSlides/notesSlide24.xml><?xml version="1.0" encoding="utf-8"?>
+<p:notes xmlns:a="http://schemas.openxmlformats.org/drawingml/2006/main" xmlns:p="http://schemas.openxmlformats.org/presentationml/2006/main" xmlns:r="http://schemas.openxmlformats.org/officeDocument/2006/relationships">
+  <p:cSld>
+    <p:spTree>
+      <p:nvGrpSpPr>
+        <p:cNvPr id="1" name=""/>
+        <p:cNvGrpSpPr/>
+        <p:nvPr/>
+      </p:nvGrpSpPr>
+      <p:grpSpPr>
+        <a:xfrm>
+          <a:off x="0" y="0"/>
+          <a:ext cx="0" cy="0"/>
+          <a:chOff x="0" y="0"/>
+          <a:chExt cx="0" cy="0"/>
+        </a:xfrm>
+      </p:grpSpPr>
+      <p:sp>
+        <p:nvSpPr>
+          <p:cNvPr id="2" name="Slide Image Placeholder 1"/>
+          <p:cNvSpPr>
+            <a:spLocks noGrp="1"/>
+          </p:cNvSpPr>
+          <p:nvPr>
+            <p:ph type="sldImg" idx="2"/>
+          </p:nvPr>
+        </p:nvSpPr>
+        <p:spPr/>
+      </p:sp>
+      <p:sp>
+        <p:nvSpPr>
+          <p:cNvPr id="3" name="Notes Placeholder 2"/>
+          <p:cNvSpPr>
+            <a:spLocks noGrp="1"/>
+          </p:cNvSpPr>
+          <p:nvPr>
+            <p:ph type="body" idx="3" sz="quarter"/>
+          </p:nvPr>
+        </p:nvSpPr>
+        <p:spPr/>
+        <p:txBody>
+          <a:bodyPr/>
+          <a:lstStyle/>
+          <a:p>
+            <a:r>
+              <a:t>RETO 6 · La cadena de favores — 🔓 puzzel &amp; escape</a:t>
+            </a:r>
+          </a:p>
+          <a:p>
+            <a:r>
+              <a:t>OPDRACHT: Geef de gunst door met le en stuur hem terug met les. Zonder de ketting te breken.</a:t>
+            </a:r>
+          </a:p>
+          <a:p>
+            <a:r>
+              <a:t>DE REGEL: Heen gaat het altijd via «le» (aan één persoon), terug altijd via «les» (aan de groep). Wie de verkeerde vorm gebruikt, breekt de ketting en die begint opnieuw bij hem.</a:t>
+            </a:r>
+          </a:p>
+          <a:p>
+            <a:r>
+              <a:t>VERLOOP: En círculo. El primero pide un favor a su vecino. | «Le pido a … que …» y pasa. | Al llegar al final, vuelve: «Les digo a todos que …». | ¿Ha llegado el favor entero? Contadlo.</a:t>
+            </a:r>
+          </a:p>
+          <a:p>
+            <a:r>
+              <a:t>SLEUTEL: Het onderscheid le/les hangt niet aan het werkwoord maar aan het aantal ontvangers. De kettingvorm maakt dat fysiek zichtbaar: één buur is «le», de hele kring is «les».  ||  De trampa («als de gunst naar twee mensen gaat») komt elke ronde minstens één keer voor. Laat de kring die zelf betrappen in plaats van hem aan te wijzen.  ||  «Le pido que me preste» lokt de subjuntivo uit («preste»). Die hoort niet in dit leerplan: laat de kortere vorm toe, «le pido los apuntes», en stuur weg van «que».  ||  Toets of de ketting rondkomt. Twee volledige rondes is beter dan één foutloze — de tweede loopt altijd sneller.</a:t>
+            </a:r>
+          </a:p>
+          <a:p>
+            <a:r>
+              <a:t>NOTA: Een echt voorwerp dat rondgaat (een sleutel, een bal) helpt enorm: wie het vasthoudt, praat. De rest luistert, en dat is de helft van de oefening.</a:t>
+            </a:r>
+          </a:p>
+        </p:txBody>
       </p:sp>
     </p:spTree>
   </p:cSld>
@@ -34498,6 +34750,5022 @@
                 <a:latin typeface="Inter"/>
               </a:rPr>
               <a:t>21</a:t>
+            </a:r>
+          </a:p>
+        </p:txBody>
+      </p:sp>
+    </p:spTree>
+  </p:cSld>
+  <p:clrMapOvr>
+    <a:masterClrMapping/>
+  </p:clrMapOvr>
+</p:sld>
+</file>
+
+<file path=ppt/slides/slide22.xml><?xml version="1.0" encoding="utf-8"?>
+<p:sld xmlns:a="http://schemas.openxmlformats.org/drawingml/2006/main" xmlns:p="http://schemas.openxmlformats.org/presentationml/2006/main" xmlns:r="http://schemas.openxmlformats.org/officeDocument/2006/relationships">
+  <p:cSld>
+    <p:spTree>
+      <p:nvGrpSpPr>
+        <p:cNvPr id="1" name=""/>
+        <p:cNvGrpSpPr/>
+        <p:nvPr/>
+      </p:nvGrpSpPr>
+      <p:grpSpPr/>
+      <p:sp>
+        <p:nvSpPr>
+          <p:cNvPr id="2" name="Fondo"/>
+          <p:cNvSpPr/>
+          <p:nvPr/>
+        </p:nvSpPr>
+        <p:spPr>
+          <a:xfrm>
+            <a:off x="0" y="0"/>
+            <a:ext cx="12191695" cy="6858000"/>
+          </a:xfrm>
+          <a:prstGeom prst="rect">
+            <a:avLst/>
+          </a:prstGeom>
+          <a:solidFill>
+            <a:srgbClr val="FCFBF8"/>
+          </a:solidFill>
+          <a:ln>
+            <a:noFill/>
+          </a:ln>
+          <a:effectLst/>
+        </p:spPr>
+        <p:style>
+          <a:lnRef idx="1">
+            <a:schemeClr val="accent1"/>
+          </a:lnRef>
+          <a:fillRef idx="3">
+            <a:schemeClr val="accent1"/>
+          </a:fillRef>
+          <a:effectRef idx="2">
+            <a:schemeClr val="accent1"/>
+          </a:effectRef>
+          <a:fontRef idx="minor">
+            <a:schemeClr val="lt1"/>
+          </a:fontRef>
+        </p:style>
+        <p:txBody>
+          <a:bodyPr rtlCol="0" anchor="ctr"/>
+          <a:lstStyle/>
+          <a:p/>
+        </p:txBody>
+      </p:sp>
+      <p:sp>
+        <p:nvSpPr>
+          <p:cNvPr id="3" name="Cabecera"/>
+          <p:cNvSpPr/>
+          <p:nvPr/>
+        </p:nvSpPr>
+        <p:spPr>
+          <a:xfrm>
+            <a:off x="0" y="0"/>
+            <a:ext cx="12191695" cy="1078992"/>
+          </a:xfrm>
+          <a:prstGeom prst="rect">
+            <a:avLst/>
+          </a:prstGeom>
+          <a:solidFill>
+            <a:srgbClr val="7C56A9"/>
+          </a:solidFill>
+          <a:ln>
+            <a:noFill/>
+          </a:ln>
+          <a:effectLst/>
+        </p:spPr>
+        <p:style>
+          <a:lnRef idx="1">
+            <a:schemeClr val="accent1"/>
+          </a:lnRef>
+          <a:fillRef idx="3">
+            <a:schemeClr val="accent1"/>
+          </a:fillRef>
+          <a:effectRef idx="2">
+            <a:schemeClr val="accent1"/>
+          </a:effectRef>
+          <a:fontRef idx="minor">
+            <a:schemeClr val="lt1"/>
+          </a:fontRef>
+        </p:style>
+        <p:txBody>
+          <a:bodyPr rtlCol="0" anchor="ctr"/>
+          <a:lstStyle/>
+          <a:p/>
+        </p:txBody>
+      </p:sp>
+      <p:sp>
+        <p:nvSpPr>
+          <p:cNvPr id="4" name="Chip"/>
+          <p:cNvSpPr/>
+          <p:nvPr/>
+        </p:nvSpPr>
+        <p:spPr>
+          <a:xfrm>
+            <a:off x="457200" y="182880"/>
+            <a:ext cx="3017520" cy="292608"/>
+          </a:xfrm>
+          <a:prstGeom prst="roundRect">
+            <a:avLst>
+              <a:gd name="adj" fmla="val 50000"/>
+            </a:avLst>
+          </a:prstGeom>
+          <a:solidFill>
+            <a:srgbClr val="FFFFFF"/>
+          </a:solidFill>
+          <a:ln>
+            <a:noFill/>
+          </a:ln>
+          <a:effectLst/>
+        </p:spPr>
+        <p:style>
+          <a:lnRef idx="1">
+            <a:schemeClr val="accent1"/>
+          </a:lnRef>
+          <a:fillRef idx="3">
+            <a:schemeClr val="accent1"/>
+          </a:fillRef>
+          <a:effectRef idx="2">
+            <a:schemeClr val="accent1"/>
+          </a:effectRef>
+          <a:fontRef idx="minor">
+            <a:schemeClr val="lt1"/>
+          </a:fontRef>
+        </p:style>
+        <p:txBody>
+          <a:bodyPr rtlCol="0" anchor="ctr"/>
+          <a:lstStyle/>
+          <a:p/>
+        </p:txBody>
+      </p:sp>
+      <p:sp>
+        <p:nvSpPr>
+          <p:cNvPr id="5" name="ChipTxt"/>
+          <p:cNvSpPr txBox="1"/>
+          <p:nvPr/>
+        </p:nvSpPr>
+        <p:spPr>
+          <a:xfrm>
+            <a:off x="457200" y="173736"/>
+            <a:ext cx="3017520" cy="310896"/>
+          </a:xfrm>
+          <a:prstGeom prst="rect">
+            <a:avLst/>
+          </a:prstGeom>
+          <a:noFill/>
+        </p:spPr>
+        <p:txBody>
+          <a:bodyPr wrap="square" anchor="ctr" lIns="45720" rIns="45720" tIns="27432" bIns="27432">
+            <a:normAutofit/>
+          </a:bodyPr>
+          <a:lstStyle/>
+          <a:p>
+            <a:pPr algn="ctr"/>
+            <a:r>
+              <a:rPr sz="950" b="1">
+                <a:solidFill>
+                  <a:srgbClr val="5B3E83"/>
+                </a:solidFill>
+                <a:latin typeface="Inter"/>
+              </a:rPr>
+              <a:t>RETO 2 · ONDERHANDELING &amp; DILEMMA</a:t>
+            </a:r>
+          </a:p>
+        </p:txBody>
+      </p:sp>
+      <p:sp>
+        <p:nvSpPr>
+          <p:cNvPr id="6" name="Titulo"/>
+          <p:cNvSpPr txBox="1"/>
+          <p:nvPr/>
+        </p:nvSpPr>
+        <p:spPr>
+          <a:xfrm>
+            <a:off x="457200" y="502920"/>
+            <a:ext cx="8412480" cy="475488"/>
+          </a:xfrm>
+          <a:prstGeom prst="rect">
+            <a:avLst/>
+          </a:prstGeom>
+          <a:noFill/>
+        </p:spPr>
+        <p:txBody>
+          <a:bodyPr wrap="square" anchor="t" lIns="45720" rIns="45720" tIns="27432" bIns="27432">
+            <a:normAutofit/>
+          </a:bodyPr>
+          <a:lstStyle/>
+          <a:p>
+            <a:pPr algn="l"/>
+            <a:r>
+              <a:rPr sz="2700" b="1">
+                <a:solidFill>
+                  <a:srgbClr val="FFFFFF"/>
+                </a:solidFill>
+                <a:latin typeface="Bricolage Grotesque"/>
+              </a:rPr>
+              <a:t>Detox de 24 horas</a:t>
+            </a:r>
+          </a:p>
+        </p:txBody>
+      </p:sp>
+      <p:sp>
+        <p:nvSpPr>
+          <p:cNvPr id="7" name="Badges"/>
+          <p:cNvSpPr txBox="1"/>
+          <p:nvPr/>
+        </p:nvSpPr>
+        <p:spPr>
+          <a:xfrm>
+            <a:off x="9052560" y="256032"/>
+            <a:ext cx="2651760" cy="640080"/>
+          </a:xfrm>
+          <a:prstGeom prst="rect">
+            <a:avLst/>
+          </a:prstGeom>
+          <a:noFill/>
+        </p:spPr>
+        <p:txBody>
+          <a:bodyPr wrap="square" anchor="t" lIns="45720" rIns="45720" tIns="27432" bIns="27432">
+            <a:normAutofit/>
+          </a:bodyPr>
+          <a:lstStyle/>
+          <a:p>
+            <a:pPr algn="r"/>
+            <a:r>
+              <a:rPr sz="1000">
+                <a:solidFill>
+                  <a:srgbClr val="EEE8F5"/>
+                </a:solidFill>
+                <a:latin typeface="Inter"/>
+              </a:rPr>
+              <a:t>👨‍👩‍👧 En grupos</a:t>
+            </a:r>
+          </a:p>
+          <a:p>
+            <a:pPr algn="r"/>
+            <a:r>
+              <a:rPr sz="1000">
+                <a:solidFill>
+                  <a:srgbClr val="EEE8F5"/>
+                </a:solidFill>
+                <a:latin typeface="Inter"/>
+              </a:rPr>
+              <a:t>± 18 min · ★★★</a:t>
+            </a:r>
+          </a:p>
+        </p:txBody>
+      </p:sp>
+      <p:sp>
+        <p:nvSpPr>
+          <p:cNvPr id="8" name="Gancho"/>
+          <p:cNvSpPr txBox="1"/>
+          <p:nvPr/>
+        </p:nvSpPr>
+        <p:spPr>
+          <a:xfrm>
+            <a:off x="457200" y="1225296"/>
+            <a:ext cx="11274552" cy="566928"/>
+          </a:xfrm>
+          <a:prstGeom prst="rect">
+            <a:avLst/>
+          </a:prstGeom>
+          <a:noFill/>
+        </p:spPr>
+        <p:txBody>
+          <a:bodyPr wrap="square" anchor="t" lIns="45720" rIns="45720" tIns="27432" bIns="27432">
+            <a:normAutofit/>
+          </a:bodyPr>
+          <a:lstStyle/>
+          <a:p>
+            <a:pPr algn="l"/>
+            <a:r>
+              <a:rPr sz="1600" b="1">
+                <a:solidFill>
+                  <a:srgbClr val="5B3E83"/>
+                </a:solidFill>
+                <a:latin typeface="Bricolage Grotesque"/>
+              </a:rPr>
+              <a:t>Un día entero sin pantalla. Planificadlo hora por hora — y defendedlo.</a:t>
+            </a:r>
+          </a:p>
+          <a:p>
+            <a:pPr algn="l"/>
+            <a:r>
+              <a:rPr sz="1100" i="1">
+                <a:solidFill>
+                  <a:srgbClr val="6A6E78"/>
+                </a:solidFill>
+                <a:latin typeface="Inter"/>
+              </a:rPr>
+              <a:t>Een hele dag zonder scherm. Plan hem uur per uur — en verdedig hem.</a:t>
+            </a:r>
+          </a:p>
+        </p:txBody>
+      </p:sp>
+      <p:sp>
+        <p:nvSpPr>
+          <p:cNvPr id="9" name="ReglaCaja"/>
+          <p:cNvSpPr/>
+          <p:nvPr/>
+        </p:nvSpPr>
+        <p:spPr>
+          <a:xfrm>
+            <a:off x="457200" y="1847088"/>
+            <a:ext cx="11274552" cy="658368"/>
+          </a:xfrm>
+          <a:prstGeom prst="roundRect">
+            <a:avLst>
+              <a:gd name="adj" fmla="val 5000"/>
+            </a:avLst>
+          </a:prstGeom>
+          <a:solidFill>
+            <a:srgbClr val="FBF3D6"/>
+          </a:solidFill>
+          <a:ln>
+            <a:noFill/>
+          </a:ln>
+          <a:effectLst/>
+        </p:spPr>
+        <p:style>
+          <a:lnRef idx="1">
+            <a:schemeClr val="accent1"/>
+          </a:lnRef>
+          <a:fillRef idx="3">
+            <a:schemeClr val="accent1"/>
+          </a:fillRef>
+          <a:effectRef idx="2">
+            <a:schemeClr val="accent1"/>
+          </a:effectRef>
+          <a:fontRef idx="minor">
+            <a:schemeClr val="lt1"/>
+          </a:fontRef>
+        </p:style>
+        <p:txBody>
+          <a:bodyPr rtlCol="0" anchor="ctr"/>
+          <a:lstStyle/>
+          <a:p/>
+        </p:txBody>
+      </p:sp>
+      <p:sp>
+        <p:nvSpPr>
+          <p:cNvPr id="10" name="ReglaTxt"/>
+          <p:cNvSpPr txBox="1"/>
+          <p:nvPr/>
+        </p:nvSpPr>
+        <p:spPr>
+          <a:xfrm>
+            <a:off x="603504" y="1883664"/>
+            <a:ext cx="10972800" cy="585216"/>
+          </a:xfrm>
+          <a:prstGeom prst="rect">
+            <a:avLst/>
+          </a:prstGeom>
+          <a:noFill/>
+        </p:spPr>
+        <p:txBody>
+          <a:bodyPr wrap="square" anchor="t" lIns="45720" rIns="45720" tIns="27432" bIns="27432">
+            <a:normAutofit/>
+          </a:bodyPr>
+          <a:lstStyle/>
+          <a:p>
+            <a:pPr algn="l"/>
+            <a:r>
+              <a:rPr sz="850" b="1">
+                <a:solidFill>
+                  <a:srgbClr val="B7860B"/>
+                </a:solidFill>
+                <a:latin typeface="Inter"/>
+              </a:rPr>
+              <a:t>LA REGLA DEL RETO</a:t>
+            </a:r>
+          </a:p>
+          <a:p>
+            <a:pPr algn="l"/>
+            <a:r>
+              <a:rPr sz="1100">
+                <a:solidFill>
+                  <a:srgbClr val="20242E"/>
+                </a:solidFill>
+                <a:latin typeface="Inter"/>
+              </a:rPr>
+              <a:t>Elk blok van de dag krijgt een «vamos a»-zin met een concrete activiteit. En je moet drie tegenwerpingen weerleggen — het plan telt pas als het de test doorstaat.</a:t>
+            </a:r>
+          </a:p>
+        </p:txBody>
+      </p:sp>
+      <p:sp>
+        <p:nvSpPr>
+          <p:cNvPr id="11" name="Tarjeta 0"/>
+          <p:cNvSpPr/>
+          <p:nvPr/>
+        </p:nvSpPr>
+        <p:spPr>
+          <a:xfrm>
+            <a:off x="457200" y="2670048"/>
+            <a:ext cx="2708910" cy="898398"/>
+          </a:xfrm>
+          <a:prstGeom prst="roundRect">
+            <a:avLst>
+              <a:gd name="adj" fmla="val 6000"/>
+            </a:avLst>
+          </a:prstGeom>
+          <a:solidFill>
+            <a:srgbClr val="FFFFFF"/>
+          </a:solidFill>
+          <a:ln w="12700">
+            <a:solidFill>
+              <a:srgbClr val="E4E3DE"/>
+            </a:solidFill>
+          </a:ln>
+          <a:effectLst/>
+        </p:spPr>
+        <p:style>
+          <a:lnRef idx="1">
+            <a:schemeClr val="accent1"/>
+          </a:lnRef>
+          <a:fillRef idx="3">
+            <a:schemeClr val="accent1"/>
+          </a:fillRef>
+          <a:effectRef idx="2">
+            <a:schemeClr val="accent1"/>
+          </a:effectRef>
+          <a:fontRef idx="minor">
+            <a:schemeClr val="lt1"/>
+          </a:fontRef>
+        </p:style>
+        <p:txBody>
+          <a:bodyPr rtlCol="0" anchor="ctr"/>
+          <a:lstStyle/>
+          <a:p/>
+        </p:txBody>
+      </p:sp>
+      <p:sp>
+        <p:nvSpPr>
+          <p:cNvPr id="12" name="TarjetaTxt 0"/>
+          <p:cNvSpPr txBox="1"/>
+          <p:nvPr/>
+        </p:nvSpPr>
+        <p:spPr>
+          <a:xfrm>
+            <a:off x="548640" y="2724912"/>
+            <a:ext cx="2526030" cy="788670"/>
+          </a:xfrm>
+          <a:prstGeom prst="rect">
+            <a:avLst/>
+          </a:prstGeom>
+          <a:noFill/>
+        </p:spPr>
+        <p:txBody>
+          <a:bodyPr wrap="square" anchor="t" lIns="45720" rIns="45720" tIns="27432" bIns="27432">
+            <a:normAutofit/>
+          </a:bodyPr>
+          <a:lstStyle/>
+          <a:p>
+            <a:pPr algn="l"/>
+            <a:r>
+              <a:rPr sz="1100" b="1">
+                <a:solidFill>
+                  <a:srgbClr val="5B3E83"/>
+                </a:solidFill>
+                <a:latin typeface="Bricolage Grotesque"/>
+              </a:rPr>
+              <a:t>la mañana</a:t>
+            </a:r>
+          </a:p>
+          <a:p>
+            <a:pPr algn="l"/>
+            <a:r>
+              <a:rPr sz="1000">
+                <a:solidFill>
+                  <a:srgbClr val="20242E"/>
+                </a:solidFill>
+                <a:latin typeface="Inter"/>
+              </a:rPr>
+              <a:t>de 8:00 a 12:00</a:t>
+            </a:r>
+          </a:p>
+        </p:txBody>
+      </p:sp>
+      <p:sp>
+        <p:nvSpPr>
+          <p:cNvPr id="13" name="Tarjeta 1"/>
+          <p:cNvSpPr/>
+          <p:nvPr/>
+        </p:nvSpPr>
+        <p:spPr>
+          <a:xfrm>
+            <a:off x="3312414" y="2670048"/>
+            <a:ext cx="2708910" cy="898398"/>
+          </a:xfrm>
+          <a:prstGeom prst="roundRect">
+            <a:avLst>
+              <a:gd name="adj" fmla="val 6000"/>
+            </a:avLst>
+          </a:prstGeom>
+          <a:solidFill>
+            <a:srgbClr val="FFFFFF"/>
+          </a:solidFill>
+          <a:ln w="12700">
+            <a:solidFill>
+              <a:srgbClr val="E4E3DE"/>
+            </a:solidFill>
+          </a:ln>
+          <a:effectLst/>
+        </p:spPr>
+        <p:style>
+          <a:lnRef idx="1">
+            <a:schemeClr val="accent1"/>
+          </a:lnRef>
+          <a:fillRef idx="3">
+            <a:schemeClr val="accent1"/>
+          </a:fillRef>
+          <a:effectRef idx="2">
+            <a:schemeClr val="accent1"/>
+          </a:effectRef>
+          <a:fontRef idx="minor">
+            <a:schemeClr val="lt1"/>
+          </a:fontRef>
+        </p:style>
+        <p:txBody>
+          <a:bodyPr rtlCol="0" anchor="ctr"/>
+          <a:lstStyle/>
+          <a:p/>
+        </p:txBody>
+      </p:sp>
+      <p:sp>
+        <p:nvSpPr>
+          <p:cNvPr id="14" name="TarjetaTxt 1"/>
+          <p:cNvSpPr txBox="1"/>
+          <p:nvPr/>
+        </p:nvSpPr>
+        <p:spPr>
+          <a:xfrm>
+            <a:off x="3403854" y="2724912"/>
+            <a:ext cx="2526030" cy="788670"/>
+          </a:xfrm>
+          <a:prstGeom prst="rect">
+            <a:avLst/>
+          </a:prstGeom>
+          <a:noFill/>
+        </p:spPr>
+        <p:txBody>
+          <a:bodyPr wrap="square" anchor="t" lIns="45720" rIns="45720" tIns="27432" bIns="27432">
+            <a:normAutofit/>
+          </a:bodyPr>
+          <a:lstStyle/>
+          <a:p>
+            <a:pPr algn="l"/>
+            <a:r>
+              <a:rPr sz="1100" b="1">
+                <a:solidFill>
+                  <a:srgbClr val="5B3E83"/>
+                </a:solidFill>
+                <a:latin typeface="Bricolage Grotesque"/>
+              </a:rPr>
+              <a:t>la comida</a:t>
+            </a:r>
+          </a:p>
+          <a:p>
+            <a:pPr algn="l"/>
+            <a:r>
+              <a:rPr sz="1000">
+                <a:solidFill>
+                  <a:srgbClr val="20242E"/>
+                </a:solidFill>
+                <a:latin typeface="Inter"/>
+              </a:rPr>
+              <a:t>de 12:00 a 14:00</a:t>
+            </a:r>
+          </a:p>
+        </p:txBody>
+      </p:sp>
+      <p:sp>
+        <p:nvSpPr>
+          <p:cNvPr id="15" name="Tarjeta 2"/>
+          <p:cNvSpPr/>
+          <p:nvPr/>
+        </p:nvSpPr>
+        <p:spPr>
+          <a:xfrm>
+            <a:off x="6167628" y="2670048"/>
+            <a:ext cx="2708910" cy="898398"/>
+          </a:xfrm>
+          <a:prstGeom prst="roundRect">
+            <a:avLst>
+              <a:gd name="adj" fmla="val 6000"/>
+            </a:avLst>
+          </a:prstGeom>
+          <a:solidFill>
+            <a:srgbClr val="FFFFFF"/>
+          </a:solidFill>
+          <a:ln w="12700">
+            <a:solidFill>
+              <a:srgbClr val="E4E3DE"/>
+            </a:solidFill>
+          </a:ln>
+          <a:effectLst/>
+        </p:spPr>
+        <p:style>
+          <a:lnRef idx="1">
+            <a:schemeClr val="accent1"/>
+          </a:lnRef>
+          <a:fillRef idx="3">
+            <a:schemeClr val="accent1"/>
+          </a:fillRef>
+          <a:effectRef idx="2">
+            <a:schemeClr val="accent1"/>
+          </a:effectRef>
+          <a:fontRef idx="minor">
+            <a:schemeClr val="lt1"/>
+          </a:fontRef>
+        </p:style>
+        <p:txBody>
+          <a:bodyPr rtlCol="0" anchor="ctr"/>
+          <a:lstStyle/>
+          <a:p/>
+        </p:txBody>
+      </p:sp>
+      <p:sp>
+        <p:nvSpPr>
+          <p:cNvPr id="16" name="TarjetaTxt 2"/>
+          <p:cNvSpPr txBox="1"/>
+          <p:nvPr/>
+        </p:nvSpPr>
+        <p:spPr>
+          <a:xfrm>
+            <a:off x="6259068" y="2724912"/>
+            <a:ext cx="2526030" cy="788670"/>
+          </a:xfrm>
+          <a:prstGeom prst="rect">
+            <a:avLst/>
+          </a:prstGeom>
+          <a:noFill/>
+        </p:spPr>
+        <p:txBody>
+          <a:bodyPr wrap="square" anchor="t" lIns="45720" rIns="45720" tIns="27432" bIns="27432">
+            <a:normAutofit/>
+          </a:bodyPr>
+          <a:lstStyle/>
+          <a:p>
+            <a:pPr algn="l"/>
+            <a:r>
+              <a:rPr sz="1100" b="1">
+                <a:solidFill>
+                  <a:srgbClr val="5B3E83"/>
+                </a:solidFill>
+                <a:latin typeface="Bricolage Grotesque"/>
+              </a:rPr>
+              <a:t>la tarde</a:t>
+            </a:r>
+          </a:p>
+          <a:p>
+            <a:pPr algn="l"/>
+            <a:r>
+              <a:rPr sz="1000">
+                <a:solidFill>
+                  <a:srgbClr val="20242E"/>
+                </a:solidFill>
+                <a:latin typeface="Inter"/>
+              </a:rPr>
+              <a:t>de 14:00 a 18:00</a:t>
+            </a:r>
+          </a:p>
+        </p:txBody>
+      </p:sp>
+      <p:sp>
+        <p:nvSpPr>
+          <p:cNvPr id="17" name="Tarjeta 3"/>
+          <p:cNvSpPr/>
+          <p:nvPr/>
+        </p:nvSpPr>
+        <p:spPr>
+          <a:xfrm>
+            <a:off x="9022842" y="2670048"/>
+            <a:ext cx="2708910" cy="898398"/>
+          </a:xfrm>
+          <a:prstGeom prst="roundRect">
+            <a:avLst>
+              <a:gd name="adj" fmla="val 6000"/>
+            </a:avLst>
+          </a:prstGeom>
+          <a:solidFill>
+            <a:srgbClr val="FFFFFF"/>
+          </a:solidFill>
+          <a:ln w="12700">
+            <a:solidFill>
+              <a:srgbClr val="E4E3DE"/>
+            </a:solidFill>
+          </a:ln>
+          <a:effectLst/>
+        </p:spPr>
+        <p:style>
+          <a:lnRef idx="1">
+            <a:schemeClr val="accent1"/>
+          </a:lnRef>
+          <a:fillRef idx="3">
+            <a:schemeClr val="accent1"/>
+          </a:fillRef>
+          <a:effectRef idx="2">
+            <a:schemeClr val="accent1"/>
+          </a:effectRef>
+          <a:fontRef idx="minor">
+            <a:schemeClr val="lt1"/>
+          </a:fontRef>
+        </p:style>
+        <p:txBody>
+          <a:bodyPr rtlCol="0" anchor="ctr"/>
+          <a:lstStyle/>
+          <a:p/>
+        </p:txBody>
+      </p:sp>
+      <p:sp>
+        <p:nvSpPr>
+          <p:cNvPr id="18" name="TarjetaTxt 3"/>
+          <p:cNvSpPr txBox="1"/>
+          <p:nvPr/>
+        </p:nvSpPr>
+        <p:spPr>
+          <a:xfrm>
+            <a:off x="9114282" y="2724912"/>
+            <a:ext cx="2526030" cy="788670"/>
+          </a:xfrm>
+          <a:prstGeom prst="rect">
+            <a:avLst/>
+          </a:prstGeom>
+          <a:noFill/>
+        </p:spPr>
+        <p:txBody>
+          <a:bodyPr wrap="square" anchor="t" lIns="45720" rIns="45720" tIns="27432" bIns="27432">
+            <a:normAutofit/>
+          </a:bodyPr>
+          <a:lstStyle/>
+          <a:p>
+            <a:pPr algn="l"/>
+            <a:r>
+              <a:rPr sz="1100" b="1">
+                <a:solidFill>
+                  <a:srgbClr val="5B3E83"/>
+                </a:solidFill>
+                <a:latin typeface="Bricolage Grotesque"/>
+              </a:rPr>
+              <a:t>la cena</a:t>
+            </a:r>
+          </a:p>
+          <a:p>
+            <a:pPr algn="l"/>
+            <a:r>
+              <a:rPr sz="1000">
+                <a:solidFill>
+                  <a:srgbClr val="20242E"/>
+                </a:solidFill>
+                <a:latin typeface="Inter"/>
+              </a:rPr>
+              <a:t>de 18:00 a 21:00</a:t>
+            </a:r>
+          </a:p>
+        </p:txBody>
+      </p:sp>
+      <p:sp>
+        <p:nvSpPr>
+          <p:cNvPr id="19" name="Tarjeta 4"/>
+          <p:cNvSpPr/>
+          <p:nvPr/>
+        </p:nvSpPr>
+        <p:spPr>
+          <a:xfrm>
+            <a:off x="457200" y="3696462"/>
+            <a:ext cx="2708910" cy="898398"/>
+          </a:xfrm>
+          <a:prstGeom prst="roundRect">
+            <a:avLst>
+              <a:gd name="adj" fmla="val 6000"/>
+            </a:avLst>
+          </a:prstGeom>
+          <a:solidFill>
+            <a:srgbClr val="FFFFFF"/>
+          </a:solidFill>
+          <a:ln w="12700">
+            <a:solidFill>
+              <a:srgbClr val="E4E3DE"/>
+            </a:solidFill>
+          </a:ln>
+          <a:effectLst/>
+        </p:spPr>
+        <p:style>
+          <a:lnRef idx="1">
+            <a:schemeClr val="accent1"/>
+          </a:lnRef>
+          <a:fillRef idx="3">
+            <a:schemeClr val="accent1"/>
+          </a:fillRef>
+          <a:effectRef idx="2">
+            <a:schemeClr val="accent1"/>
+          </a:effectRef>
+          <a:fontRef idx="minor">
+            <a:schemeClr val="lt1"/>
+          </a:fontRef>
+        </p:style>
+        <p:txBody>
+          <a:bodyPr rtlCol="0" anchor="ctr"/>
+          <a:lstStyle/>
+          <a:p/>
+        </p:txBody>
+      </p:sp>
+      <p:sp>
+        <p:nvSpPr>
+          <p:cNvPr id="20" name="TarjetaTxt 4"/>
+          <p:cNvSpPr txBox="1"/>
+          <p:nvPr/>
+        </p:nvSpPr>
+        <p:spPr>
+          <a:xfrm>
+            <a:off x="548640" y="3751326"/>
+            <a:ext cx="2526030" cy="788670"/>
+          </a:xfrm>
+          <a:prstGeom prst="rect">
+            <a:avLst/>
+          </a:prstGeom>
+          <a:noFill/>
+        </p:spPr>
+        <p:txBody>
+          <a:bodyPr wrap="square" anchor="t" lIns="45720" rIns="45720" tIns="27432" bIns="27432">
+            <a:normAutofit/>
+          </a:bodyPr>
+          <a:lstStyle/>
+          <a:p>
+            <a:pPr algn="l"/>
+            <a:r>
+              <a:rPr sz="1100" b="1">
+                <a:solidFill>
+                  <a:srgbClr val="5B3E83"/>
+                </a:solidFill>
+                <a:latin typeface="Bricolage Grotesque"/>
+              </a:rPr>
+              <a:t>la noche</a:t>
+            </a:r>
+          </a:p>
+          <a:p>
+            <a:pPr algn="l"/>
+            <a:r>
+              <a:rPr sz="1000">
+                <a:solidFill>
+                  <a:srgbClr val="20242E"/>
+                </a:solidFill>
+                <a:latin typeface="Inter"/>
+              </a:rPr>
+              <a:t>de 21:00 a 23:00</a:t>
+            </a:r>
+          </a:p>
+        </p:txBody>
+      </p:sp>
+      <p:sp>
+        <p:nvSpPr>
+          <p:cNvPr id="21" name="Tarjeta 5"/>
+          <p:cNvSpPr/>
+          <p:nvPr/>
+        </p:nvSpPr>
+        <p:spPr>
+          <a:xfrm>
+            <a:off x="3312414" y="3696462"/>
+            <a:ext cx="2708910" cy="898398"/>
+          </a:xfrm>
+          <a:prstGeom prst="roundRect">
+            <a:avLst>
+              <a:gd name="adj" fmla="val 6000"/>
+            </a:avLst>
+          </a:prstGeom>
+          <a:solidFill>
+            <a:srgbClr val="FFFFFF"/>
+          </a:solidFill>
+          <a:ln w="12700">
+            <a:solidFill>
+              <a:srgbClr val="E4E3DE"/>
+            </a:solidFill>
+          </a:ln>
+          <a:effectLst/>
+        </p:spPr>
+        <p:style>
+          <a:lnRef idx="1">
+            <a:schemeClr val="accent1"/>
+          </a:lnRef>
+          <a:fillRef idx="3">
+            <a:schemeClr val="accent1"/>
+          </a:fillRef>
+          <a:effectRef idx="2">
+            <a:schemeClr val="accent1"/>
+          </a:effectRef>
+          <a:fontRef idx="minor">
+            <a:schemeClr val="lt1"/>
+          </a:fontRef>
+        </p:style>
+        <p:txBody>
+          <a:bodyPr rtlCol="0" anchor="ctr"/>
+          <a:lstStyle/>
+          <a:p/>
+        </p:txBody>
+      </p:sp>
+      <p:sp>
+        <p:nvSpPr>
+          <p:cNvPr id="22" name="TarjetaTxt 5"/>
+          <p:cNvSpPr txBox="1"/>
+          <p:nvPr/>
+        </p:nvSpPr>
+        <p:spPr>
+          <a:xfrm>
+            <a:off x="3403854" y="3751326"/>
+            <a:ext cx="2526030" cy="788670"/>
+          </a:xfrm>
+          <a:prstGeom prst="rect">
+            <a:avLst/>
+          </a:prstGeom>
+          <a:noFill/>
+        </p:spPr>
+        <p:txBody>
+          <a:bodyPr wrap="square" anchor="t" lIns="45720" rIns="45720" tIns="27432" bIns="27432">
+            <a:normAutofit/>
+          </a:bodyPr>
+          <a:lstStyle/>
+          <a:p>
+            <a:pPr algn="l"/>
+            <a:r>
+              <a:rPr sz="1100" b="1">
+                <a:solidFill>
+                  <a:srgbClr val="5B3E83"/>
+                </a:solidFill>
+                <a:latin typeface="Bricolage Grotesque"/>
+              </a:rPr>
+              <a:t>La pega</a:t>
+            </a:r>
+          </a:p>
+          <a:p>
+            <a:pPr algn="l"/>
+            <a:r>
+              <a:rPr sz="1000">
+                <a:solidFill>
+                  <a:srgbClr val="20242E"/>
+                </a:solidFill>
+                <a:latin typeface="Inter"/>
+              </a:rPr>
+              <a:t>¿Y si alguien tiene que avisar de algo urgente?</a:t>
+            </a:r>
+          </a:p>
+        </p:txBody>
+      </p:sp>
+      <p:sp>
+        <p:nvSpPr>
+          <p:cNvPr id="23" name="Tarjeta 6"/>
+          <p:cNvSpPr/>
+          <p:nvPr/>
+        </p:nvSpPr>
+        <p:spPr>
+          <a:xfrm>
+            <a:off x="6167628" y="3696462"/>
+            <a:ext cx="2708910" cy="898398"/>
+          </a:xfrm>
+          <a:prstGeom prst="roundRect">
+            <a:avLst>
+              <a:gd name="adj" fmla="val 6000"/>
+            </a:avLst>
+          </a:prstGeom>
+          <a:solidFill>
+            <a:srgbClr val="FFFFFF"/>
+          </a:solidFill>
+          <a:ln w="12700">
+            <a:solidFill>
+              <a:srgbClr val="E4E3DE"/>
+            </a:solidFill>
+          </a:ln>
+          <a:effectLst/>
+        </p:spPr>
+        <p:style>
+          <a:lnRef idx="1">
+            <a:schemeClr val="accent1"/>
+          </a:lnRef>
+          <a:fillRef idx="3">
+            <a:schemeClr val="accent1"/>
+          </a:fillRef>
+          <a:effectRef idx="2">
+            <a:schemeClr val="accent1"/>
+          </a:effectRef>
+          <a:fontRef idx="minor">
+            <a:schemeClr val="lt1"/>
+          </a:fontRef>
+        </p:style>
+        <p:txBody>
+          <a:bodyPr rtlCol="0" anchor="ctr"/>
+          <a:lstStyle/>
+          <a:p/>
+        </p:txBody>
+      </p:sp>
+      <p:sp>
+        <p:nvSpPr>
+          <p:cNvPr id="24" name="TarjetaTxt 6"/>
+          <p:cNvSpPr txBox="1"/>
+          <p:nvPr/>
+        </p:nvSpPr>
+        <p:spPr>
+          <a:xfrm>
+            <a:off x="6259068" y="3751326"/>
+            <a:ext cx="2526030" cy="788670"/>
+          </a:xfrm>
+          <a:prstGeom prst="rect">
+            <a:avLst/>
+          </a:prstGeom>
+          <a:noFill/>
+        </p:spPr>
+        <p:txBody>
+          <a:bodyPr wrap="square" anchor="t" lIns="45720" rIns="45720" tIns="27432" bIns="27432">
+            <a:normAutofit/>
+          </a:bodyPr>
+          <a:lstStyle/>
+          <a:p>
+            <a:pPr algn="l"/>
+            <a:r>
+              <a:rPr sz="1100" b="1">
+                <a:solidFill>
+                  <a:srgbClr val="5B3E83"/>
+                </a:solidFill>
+                <a:latin typeface="Bricolage Grotesque"/>
+              </a:rPr>
+              <a:t>La pega</a:t>
+            </a:r>
+          </a:p>
+          <a:p>
+            <a:pPr algn="l"/>
+            <a:r>
+              <a:rPr sz="1000">
+                <a:solidFill>
+                  <a:srgbClr val="20242E"/>
+                </a:solidFill>
+                <a:latin typeface="Inter"/>
+              </a:rPr>
+              <a:t>¿Cómo vais a quedar sin móvil?</a:t>
+            </a:r>
+          </a:p>
+        </p:txBody>
+      </p:sp>
+      <p:sp>
+        <p:nvSpPr>
+          <p:cNvPr id="25" name="Tarjeta 7"/>
+          <p:cNvSpPr/>
+          <p:nvPr/>
+        </p:nvSpPr>
+        <p:spPr>
+          <a:xfrm>
+            <a:off x="9022842" y="3696462"/>
+            <a:ext cx="2708910" cy="898398"/>
+          </a:xfrm>
+          <a:prstGeom prst="roundRect">
+            <a:avLst>
+              <a:gd name="adj" fmla="val 6000"/>
+            </a:avLst>
+          </a:prstGeom>
+          <a:solidFill>
+            <a:srgbClr val="FFFFFF"/>
+          </a:solidFill>
+          <a:ln w="12700">
+            <a:solidFill>
+              <a:srgbClr val="E4E3DE"/>
+            </a:solidFill>
+          </a:ln>
+          <a:effectLst/>
+        </p:spPr>
+        <p:style>
+          <a:lnRef idx="1">
+            <a:schemeClr val="accent1"/>
+          </a:lnRef>
+          <a:fillRef idx="3">
+            <a:schemeClr val="accent1"/>
+          </a:fillRef>
+          <a:effectRef idx="2">
+            <a:schemeClr val="accent1"/>
+          </a:effectRef>
+          <a:fontRef idx="minor">
+            <a:schemeClr val="lt1"/>
+          </a:fontRef>
+        </p:style>
+        <p:txBody>
+          <a:bodyPr rtlCol="0" anchor="ctr"/>
+          <a:lstStyle/>
+          <a:p/>
+        </p:txBody>
+      </p:sp>
+      <p:sp>
+        <p:nvSpPr>
+          <p:cNvPr id="26" name="TarjetaTxt 7"/>
+          <p:cNvSpPr txBox="1"/>
+          <p:nvPr/>
+        </p:nvSpPr>
+        <p:spPr>
+          <a:xfrm>
+            <a:off x="9114282" y="3751326"/>
+            <a:ext cx="2526030" cy="788670"/>
+          </a:xfrm>
+          <a:prstGeom prst="rect">
+            <a:avLst/>
+          </a:prstGeom>
+          <a:noFill/>
+        </p:spPr>
+        <p:txBody>
+          <a:bodyPr wrap="square" anchor="t" lIns="45720" rIns="45720" tIns="27432" bIns="27432">
+            <a:normAutofit/>
+          </a:bodyPr>
+          <a:lstStyle/>
+          <a:p>
+            <a:pPr algn="l"/>
+            <a:r>
+              <a:rPr sz="1100" b="1">
+                <a:solidFill>
+                  <a:srgbClr val="5B3E83"/>
+                </a:solidFill>
+                <a:latin typeface="Bricolage Grotesque"/>
+              </a:rPr>
+              <a:t>La pega</a:t>
+            </a:r>
+          </a:p>
+          <a:p>
+            <a:pPr algn="l"/>
+            <a:r>
+              <a:rPr sz="1000">
+                <a:solidFill>
+                  <a:srgbClr val="20242E"/>
+                </a:solidFill>
+                <a:latin typeface="Inter"/>
+              </a:rPr>
+              <a:t>¿Y el despertador?</a:t>
+            </a:r>
+          </a:p>
+        </p:txBody>
+      </p:sp>
+      <p:sp>
+        <p:nvSpPr>
+          <p:cNvPr id="27" name="Tarjeta 8"/>
+          <p:cNvSpPr/>
+          <p:nvPr/>
+        </p:nvSpPr>
+        <p:spPr>
+          <a:xfrm>
+            <a:off x="457200" y="4722876"/>
+            <a:ext cx="2708910" cy="898398"/>
+          </a:xfrm>
+          <a:prstGeom prst="roundRect">
+            <a:avLst>
+              <a:gd name="adj" fmla="val 6000"/>
+            </a:avLst>
+          </a:prstGeom>
+          <a:solidFill>
+            <a:srgbClr val="FFFFFF"/>
+          </a:solidFill>
+          <a:ln w="12700">
+            <a:solidFill>
+              <a:srgbClr val="E4E3DE"/>
+            </a:solidFill>
+          </a:ln>
+          <a:effectLst/>
+        </p:spPr>
+        <p:style>
+          <a:lnRef idx="1">
+            <a:schemeClr val="accent1"/>
+          </a:lnRef>
+          <a:fillRef idx="3">
+            <a:schemeClr val="accent1"/>
+          </a:fillRef>
+          <a:effectRef idx="2">
+            <a:schemeClr val="accent1"/>
+          </a:effectRef>
+          <a:fontRef idx="minor">
+            <a:schemeClr val="lt1"/>
+          </a:fontRef>
+        </p:style>
+        <p:txBody>
+          <a:bodyPr rtlCol="0" anchor="ctr"/>
+          <a:lstStyle/>
+          <a:p/>
+        </p:txBody>
+      </p:sp>
+      <p:sp>
+        <p:nvSpPr>
+          <p:cNvPr id="28" name="TarjetaTxt 8"/>
+          <p:cNvSpPr txBox="1"/>
+          <p:nvPr/>
+        </p:nvSpPr>
+        <p:spPr>
+          <a:xfrm>
+            <a:off x="548640" y="4777740"/>
+            <a:ext cx="2526030" cy="788670"/>
+          </a:xfrm>
+          <a:prstGeom prst="rect">
+            <a:avLst/>
+          </a:prstGeom>
+          <a:noFill/>
+        </p:spPr>
+        <p:txBody>
+          <a:bodyPr wrap="square" anchor="t" lIns="45720" rIns="45720" tIns="27432" bIns="27432">
+            <a:normAutofit/>
+          </a:bodyPr>
+          <a:lstStyle/>
+          <a:p>
+            <a:pPr algn="l"/>
+            <a:r>
+              <a:rPr sz="1100" b="1">
+                <a:solidFill>
+                  <a:srgbClr val="5B3E83"/>
+                </a:solidFill>
+                <a:latin typeface="Bricolage Grotesque"/>
+              </a:rPr>
+              <a:t>La pega</a:t>
+            </a:r>
+          </a:p>
+          <a:p>
+            <a:pPr algn="l"/>
+            <a:r>
+              <a:rPr sz="1000">
+                <a:solidFill>
+                  <a:srgbClr val="20242E"/>
+                </a:solidFill>
+                <a:latin typeface="Inter"/>
+              </a:rPr>
+              <a:t>¿Qué hacéis cuando os aburráis a las cuatro de la tarde?</a:t>
+            </a:r>
+          </a:p>
+        </p:txBody>
+      </p:sp>
+      <p:sp>
+        <p:nvSpPr>
+          <p:cNvPr id="29" name="Tarjeta 9"/>
+          <p:cNvSpPr/>
+          <p:nvPr/>
+        </p:nvSpPr>
+        <p:spPr>
+          <a:xfrm>
+            <a:off x="3312414" y="4722876"/>
+            <a:ext cx="2708910" cy="898398"/>
+          </a:xfrm>
+          <a:prstGeom prst="roundRect">
+            <a:avLst>
+              <a:gd name="adj" fmla="val 6000"/>
+            </a:avLst>
+          </a:prstGeom>
+          <a:solidFill>
+            <a:srgbClr val="FFFFFF"/>
+          </a:solidFill>
+          <a:ln w="12700">
+            <a:solidFill>
+              <a:srgbClr val="E4E3DE"/>
+            </a:solidFill>
+          </a:ln>
+          <a:effectLst/>
+        </p:spPr>
+        <p:style>
+          <a:lnRef idx="1">
+            <a:schemeClr val="accent1"/>
+          </a:lnRef>
+          <a:fillRef idx="3">
+            <a:schemeClr val="accent1"/>
+          </a:fillRef>
+          <a:effectRef idx="2">
+            <a:schemeClr val="accent1"/>
+          </a:effectRef>
+          <a:fontRef idx="minor">
+            <a:schemeClr val="lt1"/>
+          </a:fontRef>
+        </p:style>
+        <p:txBody>
+          <a:bodyPr rtlCol="0" anchor="ctr"/>
+          <a:lstStyle/>
+          <a:p/>
+        </p:txBody>
+      </p:sp>
+      <p:sp>
+        <p:nvSpPr>
+          <p:cNvPr id="30" name="TarjetaTxt 9"/>
+          <p:cNvSpPr txBox="1"/>
+          <p:nvPr/>
+        </p:nvSpPr>
+        <p:spPr>
+          <a:xfrm>
+            <a:off x="3403854" y="4777740"/>
+            <a:ext cx="2526030" cy="788670"/>
+          </a:xfrm>
+          <a:prstGeom prst="rect">
+            <a:avLst/>
+          </a:prstGeom>
+          <a:noFill/>
+        </p:spPr>
+        <p:txBody>
+          <a:bodyPr wrap="square" anchor="t" lIns="45720" rIns="45720" tIns="27432" bIns="27432">
+            <a:normAutofit/>
+          </a:bodyPr>
+          <a:lstStyle/>
+          <a:p>
+            <a:pPr algn="l"/>
+            <a:r>
+              <a:rPr sz="1100" b="1">
+                <a:solidFill>
+                  <a:srgbClr val="5B3E83"/>
+                </a:solidFill>
+                <a:latin typeface="Bricolage Grotesque"/>
+              </a:rPr>
+              <a:t>La pega</a:t>
+            </a:r>
+          </a:p>
+          <a:p>
+            <a:pPr algn="l"/>
+            <a:r>
+              <a:rPr sz="1000">
+                <a:solidFill>
+                  <a:srgbClr val="20242E"/>
+                </a:solidFill>
+                <a:latin typeface="Inter"/>
+              </a:rPr>
+              <a:t>¿Y si el plan no funciona a los veinte minutos?</a:t>
+            </a:r>
+          </a:p>
+        </p:txBody>
+      </p:sp>
+      <p:sp>
+        <p:nvSpPr>
+          <p:cNvPr id="31" name="Tarjeta 10"/>
+          <p:cNvSpPr/>
+          <p:nvPr/>
+        </p:nvSpPr>
+        <p:spPr>
+          <a:xfrm>
+            <a:off x="6167628" y="4722876"/>
+            <a:ext cx="2708910" cy="898398"/>
+          </a:xfrm>
+          <a:prstGeom prst="roundRect">
+            <a:avLst>
+              <a:gd name="adj" fmla="val 6000"/>
+            </a:avLst>
+          </a:prstGeom>
+          <a:solidFill>
+            <a:srgbClr val="FFFFFF"/>
+          </a:solidFill>
+          <a:ln w="12700">
+            <a:solidFill>
+              <a:srgbClr val="E4E3DE"/>
+            </a:solidFill>
+          </a:ln>
+          <a:effectLst/>
+        </p:spPr>
+        <p:style>
+          <a:lnRef idx="1">
+            <a:schemeClr val="accent1"/>
+          </a:lnRef>
+          <a:fillRef idx="3">
+            <a:schemeClr val="accent1"/>
+          </a:fillRef>
+          <a:effectRef idx="2">
+            <a:schemeClr val="accent1"/>
+          </a:effectRef>
+          <a:fontRef idx="minor">
+            <a:schemeClr val="lt1"/>
+          </a:fontRef>
+        </p:style>
+        <p:txBody>
+          <a:bodyPr rtlCol="0" anchor="ctr"/>
+          <a:lstStyle/>
+          <a:p/>
+        </p:txBody>
+      </p:sp>
+      <p:sp>
+        <p:nvSpPr>
+          <p:cNvPr id="32" name="TarjetaTxt 10"/>
+          <p:cNvSpPr txBox="1"/>
+          <p:nvPr/>
+        </p:nvSpPr>
+        <p:spPr>
+          <a:xfrm>
+            <a:off x="6259068" y="4777740"/>
+            <a:ext cx="2526030" cy="788670"/>
+          </a:xfrm>
+          <a:prstGeom prst="rect">
+            <a:avLst/>
+          </a:prstGeom>
+          <a:noFill/>
+        </p:spPr>
+        <p:txBody>
+          <a:bodyPr wrap="square" anchor="t" lIns="45720" rIns="45720" tIns="27432" bIns="27432">
+            <a:normAutofit/>
+          </a:bodyPr>
+          <a:lstStyle/>
+          <a:p>
+            <a:pPr algn="l"/>
+            <a:r>
+              <a:rPr sz="1100" b="1">
+                <a:solidFill>
+                  <a:srgbClr val="5B3E83"/>
+                </a:solidFill>
+                <a:latin typeface="Bricolage Grotesque"/>
+              </a:rPr>
+              <a:t>marco</a:t>
+            </a:r>
+          </a:p>
+          <a:p>
+            <a:pPr algn="l"/>
+            <a:r>
+              <a:rPr sz="1000">
+                <a:solidFill>
+                  <a:srgbClr val="20242E"/>
+                </a:solidFill>
+                <a:latin typeface="Inter"/>
+              </a:rPr>
+              <a:t>Por la mañana vamos a …</a:t>
+            </a:r>
+          </a:p>
+        </p:txBody>
+      </p:sp>
+      <p:sp>
+        <p:nvSpPr>
+          <p:cNvPr id="33" name="Tarjeta 11"/>
+          <p:cNvSpPr/>
+          <p:nvPr/>
+        </p:nvSpPr>
+        <p:spPr>
+          <a:xfrm>
+            <a:off x="9022842" y="4722876"/>
+            <a:ext cx="2708910" cy="898398"/>
+          </a:xfrm>
+          <a:prstGeom prst="roundRect">
+            <a:avLst>
+              <a:gd name="adj" fmla="val 6000"/>
+            </a:avLst>
+          </a:prstGeom>
+          <a:solidFill>
+            <a:srgbClr val="FFFFFF"/>
+          </a:solidFill>
+          <a:ln w="12700">
+            <a:solidFill>
+              <a:srgbClr val="E4E3DE"/>
+            </a:solidFill>
+          </a:ln>
+          <a:effectLst/>
+        </p:spPr>
+        <p:style>
+          <a:lnRef idx="1">
+            <a:schemeClr val="accent1"/>
+          </a:lnRef>
+          <a:fillRef idx="3">
+            <a:schemeClr val="accent1"/>
+          </a:fillRef>
+          <a:effectRef idx="2">
+            <a:schemeClr val="accent1"/>
+          </a:effectRef>
+          <a:fontRef idx="minor">
+            <a:schemeClr val="lt1"/>
+          </a:fontRef>
+        </p:style>
+        <p:txBody>
+          <a:bodyPr rtlCol="0" anchor="ctr"/>
+          <a:lstStyle/>
+          <a:p/>
+        </p:txBody>
+      </p:sp>
+      <p:sp>
+        <p:nvSpPr>
+          <p:cNvPr id="34" name="TarjetaTxt 11"/>
+          <p:cNvSpPr txBox="1"/>
+          <p:nvPr/>
+        </p:nvSpPr>
+        <p:spPr>
+          <a:xfrm>
+            <a:off x="9114282" y="4777740"/>
+            <a:ext cx="2526030" cy="788670"/>
+          </a:xfrm>
+          <a:prstGeom prst="rect">
+            <a:avLst/>
+          </a:prstGeom>
+          <a:noFill/>
+        </p:spPr>
+        <p:txBody>
+          <a:bodyPr wrap="square" anchor="t" lIns="45720" rIns="45720" tIns="27432" bIns="27432">
+            <a:normAutofit/>
+          </a:bodyPr>
+          <a:lstStyle/>
+          <a:p>
+            <a:pPr algn="l"/>
+            <a:r>
+              <a:rPr sz="1100" b="1">
+                <a:solidFill>
+                  <a:srgbClr val="5B3E83"/>
+                </a:solidFill>
+                <a:latin typeface="Bricolage Grotesque"/>
+              </a:rPr>
+              <a:t>marco</a:t>
+            </a:r>
+          </a:p>
+          <a:p>
+            <a:pPr algn="l"/>
+            <a:r>
+              <a:rPr sz="1000">
+                <a:solidFill>
+                  <a:srgbClr val="20242E"/>
+                </a:solidFill>
+                <a:latin typeface="Inter"/>
+              </a:rPr>
+              <a:t>Después de comer vamos a …</a:t>
+            </a:r>
+          </a:p>
+        </p:txBody>
+      </p:sp>
+      <p:sp>
+        <p:nvSpPr>
+          <p:cNvPr id="35" name="Tarjeta 12"/>
+          <p:cNvSpPr/>
+          <p:nvPr/>
+        </p:nvSpPr>
+        <p:spPr>
+          <a:xfrm>
+            <a:off x="457200" y="5749290"/>
+            <a:ext cx="2708910" cy="898398"/>
+          </a:xfrm>
+          <a:prstGeom prst="roundRect">
+            <a:avLst>
+              <a:gd name="adj" fmla="val 6000"/>
+            </a:avLst>
+          </a:prstGeom>
+          <a:solidFill>
+            <a:srgbClr val="FFFFFF"/>
+          </a:solidFill>
+          <a:ln w="12700">
+            <a:solidFill>
+              <a:srgbClr val="E4E3DE"/>
+            </a:solidFill>
+          </a:ln>
+          <a:effectLst/>
+        </p:spPr>
+        <p:style>
+          <a:lnRef idx="1">
+            <a:schemeClr val="accent1"/>
+          </a:lnRef>
+          <a:fillRef idx="3">
+            <a:schemeClr val="accent1"/>
+          </a:fillRef>
+          <a:effectRef idx="2">
+            <a:schemeClr val="accent1"/>
+          </a:effectRef>
+          <a:fontRef idx="minor">
+            <a:schemeClr val="lt1"/>
+          </a:fontRef>
+        </p:style>
+        <p:txBody>
+          <a:bodyPr rtlCol="0" anchor="ctr"/>
+          <a:lstStyle/>
+          <a:p/>
+        </p:txBody>
+      </p:sp>
+      <p:sp>
+        <p:nvSpPr>
+          <p:cNvPr id="36" name="TarjetaTxt 12"/>
+          <p:cNvSpPr txBox="1"/>
+          <p:nvPr/>
+        </p:nvSpPr>
+        <p:spPr>
+          <a:xfrm>
+            <a:off x="548640" y="5804154"/>
+            <a:ext cx="2526030" cy="788670"/>
+          </a:xfrm>
+          <a:prstGeom prst="rect">
+            <a:avLst/>
+          </a:prstGeom>
+          <a:noFill/>
+        </p:spPr>
+        <p:txBody>
+          <a:bodyPr wrap="square" anchor="t" lIns="45720" rIns="45720" tIns="27432" bIns="27432">
+            <a:normAutofit/>
+          </a:bodyPr>
+          <a:lstStyle/>
+          <a:p>
+            <a:pPr algn="l"/>
+            <a:r>
+              <a:rPr sz="1100" b="1">
+                <a:solidFill>
+                  <a:srgbClr val="5B3E83"/>
+                </a:solidFill>
+                <a:latin typeface="Bricolage Grotesque"/>
+              </a:rPr>
+              <a:t>marco</a:t>
+            </a:r>
+          </a:p>
+          <a:p>
+            <a:pPr algn="l"/>
+            <a:r>
+              <a:rPr sz="1000">
+                <a:solidFill>
+                  <a:srgbClr val="20242E"/>
+                </a:solidFill>
+                <a:latin typeface="Inter"/>
+              </a:rPr>
+              <a:t>Para eso vamos a …, así no hace falta el móvil.</a:t>
+            </a:r>
+          </a:p>
+        </p:txBody>
+      </p:sp>
+      <p:sp>
+        <p:nvSpPr>
+          <p:cNvPr id="37" name="Tarjeta 13"/>
+          <p:cNvSpPr/>
+          <p:nvPr/>
+        </p:nvSpPr>
+        <p:spPr>
+          <a:xfrm>
+            <a:off x="3312414" y="5749290"/>
+            <a:ext cx="2708910" cy="898398"/>
+          </a:xfrm>
+          <a:prstGeom prst="roundRect">
+            <a:avLst>
+              <a:gd name="adj" fmla="val 6000"/>
+            </a:avLst>
+          </a:prstGeom>
+          <a:solidFill>
+            <a:srgbClr val="FFFFFF"/>
+          </a:solidFill>
+          <a:ln w="12700">
+            <a:solidFill>
+              <a:srgbClr val="E4E3DE"/>
+            </a:solidFill>
+          </a:ln>
+          <a:effectLst/>
+        </p:spPr>
+        <p:style>
+          <a:lnRef idx="1">
+            <a:schemeClr val="accent1"/>
+          </a:lnRef>
+          <a:fillRef idx="3">
+            <a:schemeClr val="accent1"/>
+          </a:fillRef>
+          <a:effectRef idx="2">
+            <a:schemeClr val="accent1"/>
+          </a:effectRef>
+          <a:fontRef idx="minor">
+            <a:schemeClr val="lt1"/>
+          </a:fontRef>
+        </p:style>
+        <p:txBody>
+          <a:bodyPr rtlCol="0" anchor="ctr"/>
+          <a:lstStyle/>
+          <a:p/>
+        </p:txBody>
+      </p:sp>
+      <p:sp>
+        <p:nvSpPr>
+          <p:cNvPr id="38" name="TarjetaTxt 13"/>
+          <p:cNvSpPr txBox="1"/>
+          <p:nvPr/>
+        </p:nvSpPr>
+        <p:spPr>
+          <a:xfrm>
+            <a:off x="3403854" y="5804154"/>
+            <a:ext cx="2526030" cy="788670"/>
+          </a:xfrm>
+          <a:prstGeom prst="rect">
+            <a:avLst/>
+          </a:prstGeom>
+          <a:noFill/>
+        </p:spPr>
+        <p:txBody>
+          <a:bodyPr wrap="square" anchor="t" lIns="45720" rIns="45720" tIns="27432" bIns="27432">
+            <a:normAutofit/>
+          </a:bodyPr>
+          <a:lstStyle/>
+          <a:p>
+            <a:pPr algn="l"/>
+            <a:r>
+              <a:rPr sz="1100" b="1">
+                <a:solidFill>
+                  <a:srgbClr val="5B3E83"/>
+                </a:solidFill>
+                <a:latin typeface="Bricolage Grotesque"/>
+              </a:rPr>
+              <a:t>marco</a:t>
+            </a:r>
+          </a:p>
+          <a:p>
+            <a:pPr algn="l"/>
+            <a:r>
+              <a:rPr sz="1000">
+                <a:solidFill>
+                  <a:srgbClr val="20242E"/>
+                </a:solidFill>
+                <a:latin typeface="Inter"/>
+              </a:rPr>
+              <a:t>Tienes razón, por eso vamos a …</a:t>
+            </a:r>
+          </a:p>
+        </p:txBody>
+      </p:sp>
+      <p:sp>
+        <p:nvSpPr>
+          <p:cNvPr id="39" name="Tarjeta 14"/>
+          <p:cNvSpPr/>
+          <p:nvPr/>
+        </p:nvSpPr>
+        <p:spPr>
+          <a:xfrm>
+            <a:off x="6167628" y="5749290"/>
+            <a:ext cx="2708910" cy="898398"/>
+          </a:xfrm>
+          <a:prstGeom prst="roundRect">
+            <a:avLst>
+              <a:gd name="adj" fmla="val 6000"/>
+            </a:avLst>
+          </a:prstGeom>
+          <a:solidFill>
+            <a:srgbClr val="FFFFFF"/>
+          </a:solidFill>
+          <a:ln w="12700">
+            <a:solidFill>
+              <a:srgbClr val="E4E3DE"/>
+            </a:solidFill>
+          </a:ln>
+          <a:effectLst/>
+        </p:spPr>
+        <p:style>
+          <a:lnRef idx="1">
+            <a:schemeClr val="accent1"/>
+          </a:lnRef>
+          <a:fillRef idx="3">
+            <a:schemeClr val="accent1"/>
+          </a:fillRef>
+          <a:effectRef idx="2">
+            <a:schemeClr val="accent1"/>
+          </a:effectRef>
+          <a:fontRef idx="minor">
+            <a:schemeClr val="lt1"/>
+          </a:fontRef>
+        </p:style>
+        <p:txBody>
+          <a:bodyPr rtlCol="0" anchor="ctr"/>
+          <a:lstStyle/>
+          <a:p/>
+        </p:txBody>
+      </p:sp>
+      <p:sp>
+        <p:nvSpPr>
+          <p:cNvPr id="40" name="TarjetaTxt 14"/>
+          <p:cNvSpPr txBox="1"/>
+          <p:nvPr/>
+        </p:nvSpPr>
+        <p:spPr>
+          <a:xfrm>
+            <a:off x="6259068" y="5804154"/>
+            <a:ext cx="2526030" cy="788670"/>
+          </a:xfrm>
+          <a:prstGeom prst="rect">
+            <a:avLst/>
+          </a:prstGeom>
+          <a:noFill/>
+        </p:spPr>
+        <p:txBody>
+          <a:bodyPr wrap="square" anchor="t" lIns="45720" rIns="45720" tIns="27432" bIns="27432">
+            <a:normAutofit/>
+          </a:bodyPr>
+          <a:lstStyle/>
+          <a:p>
+            <a:pPr algn="l"/>
+            <a:r>
+              <a:rPr sz="1100" b="1">
+                <a:solidFill>
+                  <a:srgbClr val="5B3E83"/>
+                </a:solidFill>
+                <a:latin typeface="Bricolage Grotesque"/>
+              </a:rPr>
+              <a:t>marco</a:t>
+            </a:r>
+          </a:p>
+          <a:p>
+            <a:pPr algn="l"/>
+            <a:r>
+              <a:rPr sz="1000">
+                <a:solidFill>
+                  <a:srgbClr val="20242E"/>
+                </a:solidFill>
+                <a:latin typeface="Inter"/>
+              </a:rPr>
+              <a:t>Si no funciona, vamos a …</a:t>
+            </a:r>
+          </a:p>
+        </p:txBody>
+      </p:sp>
+    </p:spTree>
+  </p:cSld>
+  <p:clrMapOvr>
+    <a:masterClrMapping/>
+  </p:clrMapOvr>
+</p:sld>
+</file>
+
+<file path=ppt/slides/slide23.xml><?xml version="1.0" encoding="utf-8"?>
+<p:sld xmlns:a="http://schemas.openxmlformats.org/drawingml/2006/main" xmlns:p="http://schemas.openxmlformats.org/presentationml/2006/main" xmlns:r="http://schemas.openxmlformats.org/officeDocument/2006/relationships">
+  <p:cSld>
+    <p:spTree>
+      <p:nvGrpSpPr>
+        <p:cNvPr id="1" name=""/>
+        <p:cNvGrpSpPr/>
+        <p:nvPr/>
+      </p:nvGrpSpPr>
+      <p:grpSpPr/>
+      <p:sp>
+        <p:nvSpPr>
+          <p:cNvPr id="2" name="Fondo"/>
+          <p:cNvSpPr/>
+          <p:nvPr/>
+        </p:nvSpPr>
+        <p:spPr>
+          <a:xfrm>
+            <a:off x="0" y="0"/>
+            <a:ext cx="12191695" cy="6858000"/>
+          </a:xfrm>
+          <a:prstGeom prst="rect">
+            <a:avLst/>
+          </a:prstGeom>
+          <a:solidFill>
+            <a:srgbClr val="FCFBF8"/>
+          </a:solidFill>
+          <a:ln>
+            <a:noFill/>
+          </a:ln>
+          <a:effectLst/>
+        </p:spPr>
+        <p:style>
+          <a:lnRef idx="1">
+            <a:schemeClr val="accent1"/>
+          </a:lnRef>
+          <a:fillRef idx="3">
+            <a:schemeClr val="accent1"/>
+          </a:fillRef>
+          <a:effectRef idx="2">
+            <a:schemeClr val="accent1"/>
+          </a:effectRef>
+          <a:fontRef idx="minor">
+            <a:schemeClr val="lt1"/>
+          </a:fontRef>
+        </p:style>
+        <p:txBody>
+          <a:bodyPr rtlCol="0" anchor="ctr"/>
+          <a:lstStyle/>
+          <a:p/>
+        </p:txBody>
+      </p:sp>
+      <p:sp>
+        <p:nvSpPr>
+          <p:cNvPr id="3" name="Cabecera"/>
+          <p:cNvSpPr/>
+          <p:nvPr/>
+        </p:nvSpPr>
+        <p:spPr>
+          <a:xfrm>
+            <a:off x="0" y="0"/>
+            <a:ext cx="12191695" cy="1078992"/>
+          </a:xfrm>
+          <a:prstGeom prst="rect">
+            <a:avLst/>
+          </a:prstGeom>
+          <a:solidFill>
+            <a:srgbClr val="7C56A9"/>
+          </a:solidFill>
+          <a:ln>
+            <a:noFill/>
+          </a:ln>
+          <a:effectLst/>
+        </p:spPr>
+        <p:style>
+          <a:lnRef idx="1">
+            <a:schemeClr val="accent1"/>
+          </a:lnRef>
+          <a:fillRef idx="3">
+            <a:schemeClr val="accent1"/>
+          </a:fillRef>
+          <a:effectRef idx="2">
+            <a:schemeClr val="accent1"/>
+          </a:effectRef>
+          <a:fontRef idx="minor">
+            <a:schemeClr val="lt1"/>
+          </a:fontRef>
+        </p:style>
+        <p:txBody>
+          <a:bodyPr rtlCol="0" anchor="ctr"/>
+          <a:lstStyle/>
+          <a:p/>
+        </p:txBody>
+      </p:sp>
+      <p:sp>
+        <p:nvSpPr>
+          <p:cNvPr id="4" name="Chip"/>
+          <p:cNvSpPr/>
+          <p:nvPr/>
+        </p:nvSpPr>
+        <p:spPr>
+          <a:xfrm>
+            <a:off x="457200" y="182880"/>
+            <a:ext cx="3017520" cy="292608"/>
+          </a:xfrm>
+          <a:prstGeom prst="roundRect">
+            <a:avLst>
+              <a:gd name="adj" fmla="val 50000"/>
+            </a:avLst>
+          </a:prstGeom>
+          <a:solidFill>
+            <a:srgbClr val="FFFFFF"/>
+          </a:solidFill>
+          <a:ln>
+            <a:noFill/>
+          </a:ln>
+          <a:effectLst/>
+        </p:spPr>
+        <p:style>
+          <a:lnRef idx="1">
+            <a:schemeClr val="accent1"/>
+          </a:lnRef>
+          <a:fillRef idx="3">
+            <a:schemeClr val="accent1"/>
+          </a:fillRef>
+          <a:effectRef idx="2">
+            <a:schemeClr val="accent1"/>
+          </a:effectRef>
+          <a:fontRef idx="minor">
+            <a:schemeClr val="lt1"/>
+          </a:fontRef>
+        </p:style>
+        <p:txBody>
+          <a:bodyPr rtlCol="0" anchor="ctr"/>
+          <a:lstStyle/>
+          <a:p/>
+        </p:txBody>
+      </p:sp>
+      <p:sp>
+        <p:nvSpPr>
+          <p:cNvPr id="5" name="ChipTxt"/>
+          <p:cNvSpPr txBox="1"/>
+          <p:nvPr/>
+        </p:nvSpPr>
+        <p:spPr>
+          <a:xfrm>
+            <a:off x="457200" y="173736"/>
+            <a:ext cx="3017520" cy="310896"/>
+          </a:xfrm>
+          <a:prstGeom prst="rect">
+            <a:avLst/>
+          </a:prstGeom>
+          <a:noFill/>
+        </p:spPr>
+        <p:txBody>
+          <a:bodyPr wrap="square" anchor="ctr" lIns="45720" rIns="45720" tIns="27432" bIns="27432">
+            <a:normAutofit/>
+          </a:bodyPr>
+          <a:lstStyle/>
+          <a:p>
+            <a:pPr algn="ctr"/>
+            <a:r>
+              <a:rPr sz="950" b="1">
+                <a:solidFill>
+                  <a:srgbClr val="5B3E83"/>
+                </a:solidFill>
+                <a:latin typeface="Inter"/>
+              </a:rPr>
+              <a:t>RETO 3 · BEMIDDELEN</a:t>
+            </a:r>
+          </a:p>
+        </p:txBody>
+      </p:sp>
+      <p:sp>
+        <p:nvSpPr>
+          <p:cNvPr id="6" name="Titulo"/>
+          <p:cNvSpPr txBox="1"/>
+          <p:nvPr/>
+        </p:nvSpPr>
+        <p:spPr>
+          <a:xfrm>
+            <a:off x="457200" y="502920"/>
+            <a:ext cx="8412480" cy="475488"/>
+          </a:xfrm>
+          <a:prstGeom prst="rect">
+            <a:avLst/>
+          </a:prstGeom>
+          <a:noFill/>
+        </p:spPr>
+        <p:txBody>
+          <a:bodyPr wrap="square" anchor="t" lIns="45720" rIns="45720" tIns="27432" bIns="27432">
+            <a:normAutofit/>
+          </a:bodyPr>
+          <a:lstStyle/>
+          <a:p>
+            <a:pPr algn="l"/>
+            <a:r>
+              <a:rPr sz="2700" b="1">
+                <a:solidFill>
+                  <a:srgbClr val="FFFFFF"/>
+                </a:solidFill>
+                <a:latin typeface="Bricolage Grotesque"/>
+              </a:rPr>
+              <a:t>El algoritmo explicado</a:t>
+            </a:r>
+          </a:p>
+        </p:txBody>
+      </p:sp>
+      <p:sp>
+        <p:nvSpPr>
+          <p:cNvPr id="7" name="Badges"/>
+          <p:cNvSpPr txBox="1"/>
+          <p:nvPr/>
+        </p:nvSpPr>
+        <p:spPr>
+          <a:xfrm>
+            <a:off x="9052560" y="256032"/>
+            <a:ext cx="2651760" cy="640080"/>
+          </a:xfrm>
+          <a:prstGeom prst="rect">
+            <a:avLst/>
+          </a:prstGeom>
+          <a:noFill/>
+        </p:spPr>
+        <p:txBody>
+          <a:bodyPr wrap="square" anchor="t" lIns="45720" rIns="45720" tIns="27432" bIns="27432">
+            <a:normAutofit/>
+          </a:bodyPr>
+          <a:lstStyle/>
+          <a:p>
+            <a:pPr algn="r"/>
+            <a:r>
+              <a:rPr sz="1000">
+                <a:solidFill>
+                  <a:srgbClr val="EEE8F5"/>
+                </a:solidFill>
+                <a:latin typeface="Inter"/>
+              </a:rPr>
+              <a:t>👥 En parejas</a:t>
+            </a:r>
+          </a:p>
+          <a:p>
+            <a:pPr algn="r"/>
+            <a:r>
+              <a:rPr sz="1000">
+                <a:solidFill>
+                  <a:srgbClr val="EEE8F5"/>
+                </a:solidFill>
+                <a:latin typeface="Inter"/>
+              </a:rPr>
+              <a:t>± 15 min · ★★★</a:t>
+            </a:r>
+          </a:p>
+        </p:txBody>
+      </p:sp>
+      <p:sp>
+        <p:nvSpPr>
+          <p:cNvPr id="8" name="Gancho"/>
+          <p:cNvSpPr txBox="1"/>
+          <p:nvPr/>
+        </p:nvSpPr>
+        <p:spPr>
+          <a:xfrm>
+            <a:off x="457200" y="1225296"/>
+            <a:ext cx="11274552" cy="566928"/>
+          </a:xfrm>
+          <a:prstGeom prst="rect">
+            <a:avLst/>
+          </a:prstGeom>
+          <a:noFill/>
+        </p:spPr>
+        <p:txBody>
+          <a:bodyPr wrap="square" anchor="t" lIns="45720" rIns="45720" tIns="27432" bIns="27432">
+            <a:normAutofit/>
+          </a:bodyPr>
+          <a:lstStyle/>
+          <a:p>
+            <a:pPr algn="l"/>
+            <a:r>
+              <a:rPr sz="1600" b="1">
+                <a:solidFill>
+                  <a:srgbClr val="5B3E83"/>
+                </a:solidFill>
+                <a:latin typeface="Bricolage Grotesque"/>
+              </a:rPr>
+              <a:t>Explícale a tu abuela por qué el móvil «sabe» lo que le gusta. Sin palabras en inglés.</a:t>
+            </a:r>
+          </a:p>
+          <a:p>
+            <a:pPr algn="l"/>
+            <a:r>
+              <a:rPr sz="1100" i="1">
+                <a:solidFill>
+                  <a:srgbClr val="6A6E78"/>
+                </a:solidFill>
+                <a:latin typeface="Inter"/>
+              </a:rPr>
+              <a:t>Leg je grootmoeder uit waarom de gsm «weet» wat ze leuk vindt. Zonder Engelse woorden.</a:t>
+            </a:r>
+          </a:p>
+        </p:txBody>
+      </p:sp>
+      <p:sp>
+        <p:nvSpPr>
+          <p:cNvPr id="9" name="ReglaCaja"/>
+          <p:cNvSpPr/>
+          <p:nvPr/>
+        </p:nvSpPr>
+        <p:spPr>
+          <a:xfrm>
+            <a:off x="457200" y="1847088"/>
+            <a:ext cx="11274552" cy="658368"/>
+          </a:xfrm>
+          <a:prstGeom prst="roundRect">
+            <a:avLst>
+              <a:gd name="adj" fmla="val 5000"/>
+            </a:avLst>
+          </a:prstGeom>
+          <a:solidFill>
+            <a:srgbClr val="FBF3D6"/>
+          </a:solidFill>
+          <a:ln>
+            <a:noFill/>
+          </a:ln>
+          <a:effectLst/>
+        </p:spPr>
+        <p:style>
+          <a:lnRef idx="1">
+            <a:schemeClr val="accent1"/>
+          </a:lnRef>
+          <a:fillRef idx="3">
+            <a:schemeClr val="accent1"/>
+          </a:fillRef>
+          <a:effectRef idx="2">
+            <a:schemeClr val="accent1"/>
+          </a:effectRef>
+          <a:fontRef idx="minor">
+            <a:schemeClr val="lt1"/>
+          </a:fontRef>
+        </p:style>
+        <p:txBody>
+          <a:bodyPr rtlCol="0" anchor="ctr"/>
+          <a:lstStyle/>
+          <a:p/>
+        </p:txBody>
+      </p:sp>
+      <p:sp>
+        <p:nvSpPr>
+          <p:cNvPr id="10" name="ReglaTxt"/>
+          <p:cNvSpPr txBox="1"/>
+          <p:nvPr/>
+        </p:nvSpPr>
+        <p:spPr>
+          <a:xfrm>
+            <a:off x="603504" y="1883664"/>
+            <a:ext cx="10972800" cy="585216"/>
+          </a:xfrm>
+          <a:prstGeom prst="rect">
+            <a:avLst/>
+          </a:prstGeom>
+          <a:noFill/>
+        </p:spPr>
+        <p:txBody>
+          <a:bodyPr wrap="square" anchor="t" lIns="45720" rIns="45720" tIns="27432" bIns="27432">
+            <a:normAutofit/>
+          </a:bodyPr>
+          <a:lstStyle/>
+          <a:p>
+            <a:pPr algn="l"/>
+            <a:r>
+              <a:rPr sz="850" b="1">
+                <a:solidFill>
+                  <a:srgbClr val="B7860B"/>
+                </a:solidFill>
+                <a:latin typeface="Inter"/>
+              </a:rPr>
+              <a:t>LA REGLA DEL RETO</a:t>
+            </a:r>
+          </a:p>
+          <a:p>
+            <a:pPr algn="l"/>
+            <a:r>
+              <a:rPr sz="1100">
+                <a:solidFill>
+                  <a:srgbClr val="20242E"/>
+                </a:solidFill>
+                <a:latin typeface="Inter"/>
+              </a:rPr>
+              <a:t>Geen enkel Engels woord — geen algorithm, geen feed, geen like, geen data. En geen enkele zin langer dan twaalf woorden. Wat je niet kunt uitleggen, heb je niet begrepen.</a:t>
+            </a:r>
+          </a:p>
+        </p:txBody>
+      </p:sp>
+      <p:sp>
+        <p:nvSpPr>
+          <p:cNvPr id="11" name="Tarjeta 0"/>
+          <p:cNvSpPr/>
+          <p:nvPr/>
+        </p:nvSpPr>
+        <p:spPr>
+          <a:xfrm>
+            <a:off x="457200" y="2670048"/>
+            <a:ext cx="2708910" cy="898398"/>
+          </a:xfrm>
+          <a:prstGeom prst="roundRect">
+            <a:avLst>
+              <a:gd name="adj" fmla="val 6000"/>
+            </a:avLst>
+          </a:prstGeom>
+          <a:solidFill>
+            <a:srgbClr val="FFFFFF"/>
+          </a:solidFill>
+          <a:ln w="12700">
+            <a:solidFill>
+              <a:srgbClr val="E4E3DE"/>
+            </a:solidFill>
+          </a:ln>
+          <a:effectLst/>
+        </p:spPr>
+        <p:style>
+          <a:lnRef idx="1">
+            <a:schemeClr val="accent1"/>
+          </a:lnRef>
+          <a:fillRef idx="3">
+            <a:schemeClr val="accent1"/>
+          </a:fillRef>
+          <a:effectRef idx="2">
+            <a:schemeClr val="accent1"/>
+          </a:effectRef>
+          <a:fontRef idx="minor">
+            <a:schemeClr val="lt1"/>
+          </a:fontRef>
+        </p:style>
+        <p:txBody>
+          <a:bodyPr rtlCol="0" anchor="ctr"/>
+          <a:lstStyle/>
+          <a:p/>
+        </p:txBody>
+      </p:sp>
+      <p:sp>
+        <p:nvSpPr>
+          <p:cNvPr id="12" name="TarjetaTxt 0"/>
+          <p:cNvSpPr txBox="1"/>
+          <p:nvPr/>
+        </p:nvSpPr>
+        <p:spPr>
+          <a:xfrm>
+            <a:off x="548640" y="2724912"/>
+            <a:ext cx="2526030" cy="788670"/>
+          </a:xfrm>
+          <a:prstGeom prst="rect">
+            <a:avLst/>
+          </a:prstGeom>
+          <a:noFill/>
+        </p:spPr>
+        <p:txBody>
+          <a:bodyPr wrap="square" anchor="t" lIns="45720" rIns="45720" tIns="27432" bIns="27432">
+            <a:normAutofit/>
+          </a:bodyPr>
+          <a:lstStyle/>
+          <a:p>
+            <a:pPr algn="l"/>
+            <a:r>
+              <a:rPr sz="1100" b="1">
+                <a:solidFill>
+                  <a:srgbClr val="5B3E83"/>
+                </a:solidFill>
+                <a:latin typeface="Bricolage Grotesque"/>
+              </a:rPr>
+              <a:t>PROHIBIDA</a:t>
+            </a:r>
+          </a:p>
+          <a:p>
+            <a:pPr algn="l"/>
+            <a:r>
+              <a:rPr sz="1000">
+                <a:solidFill>
+                  <a:srgbClr val="20242E"/>
+                </a:solidFill>
+                <a:latin typeface="Inter"/>
+              </a:rPr>
+              <a:t>algoritmo — es una palabra española, pero hay que explicarla igual</a:t>
+            </a:r>
+          </a:p>
+        </p:txBody>
+      </p:sp>
+      <p:sp>
+        <p:nvSpPr>
+          <p:cNvPr id="13" name="Tarjeta 1"/>
+          <p:cNvSpPr/>
+          <p:nvPr/>
+        </p:nvSpPr>
+        <p:spPr>
+          <a:xfrm>
+            <a:off x="3312414" y="2670048"/>
+            <a:ext cx="2708910" cy="898398"/>
+          </a:xfrm>
+          <a:prstGeom prst="roundRect">
+            <a:avLst>
+              <a:gd name="adj" fmla="val 6000"/>
+            </a:avLst>
+          </a:prstGeom>
+          <a:solidFill>
+            <a:srgbClr val="FFFFFF"/>
+          </a:solidFill>
+          <a:ln w="12700">
+            <a:solidFill>
+              <a:srgbClr val="E4E3DE"/>
+            </a:solidFill>
+          </a:ln>
+          <a:effectLst/>
+        </p:spPr>
+        <p:style>
+          <a:lnRef idx="1">
+            <a:schemeClr val="accent1"/>
+          </a:lnRef>
+          <a:fillRef idx="3">
+            <a:schemeClr val="accent1"/>
+          </a:fillRef>
+          <a:effectRef idx="2">
+            <a:schemeClr val="accent1"/>
+          </a:effectRef>
+          <a:fontRef idx="minor">
+            <a:schemeClr val="lt1"/>
+          </a:fontRef>
+        </p:style>
+        <p:txBody>
+          <a:bodyPr rtlCol="0" anchor="ctr"/>
+          <a:lstStyle/>
+          <a:p/>
+        </p:txBody>
+      </p:sp>
+      <p:sp>
+        <p:nvSpPr>
+          <p:cNvPr id="14" name="TarjetaTxt 1"/>
+          <p:cNvSpPr txBox="1"/>
+          <p:nvPr/>
+        </p:nvSpPr>
+        <p:spPr>
+          <a:xfrm>
+            <a:off x="3403854" y="2724912"/>
+            <a:ext cx="2526030" cy="788670"/>
+          </a:xfrm>
+          <a:prstGeom prst="rect">
+            <a:avLst/>
+          </a:prstGeom>
+          <a:noFill/>
+        </p:spPr>
+        <p:txBody>
+          <a:bodyPr wrap="square" anchor="t" lIns="45720" rIns="45720" tIns="27432" bIns="27432">
+            <a:normAutofit/>
+          </a:bodyPr>
+          <a:lstStyle/>
+          <a:p>
+            <a:pPr algn="l"/>
+            <a:r>
+              <a:rPr sz="1100" b="1">
+                <a:solidFill>
+                  <a:srgbClr val="5B3E83"/>
+                </a:solidFill>
+                <a:latin typeface="Bricolage Grotesque"/>
+              </a:rPr>
+              <a:t>PROHIBIDA</a:t>
+            </a:r>
+          </a:p>
+          <a:p>
+            <a:pPr algn="l"/>
+            <a:r>
+              <a:rPr sz="1000">
+                <a:solidFill>
+                  <a:srgbClr val="20242E"/>
+                </a:solidFill>
+                <a:latin typeface="Inter"/>
+              </a:rPr>
+              <a:t>feed — → lo que te sale / lo que ves</a:t>
+            </a:r>
+          </a:p>
+        </p:txBody>
+      </p:sp>
+      <p:sp>
+        <p:nvSpPr>
+          <p:cNvPr id="15" name="Tarjeta 2"/>
+          <p:cNvSpPr/>
+          <p:nvPr/>
+        </p:nvSpPr>
+        <p:spPr>
+          <a:xfrm>
+            <a:off x="6167628" y="2670048"/>
+            <a:ext cx="2708910" cy="898398"/>
+          </a:xfrm>
+          <a:prstGeom prst="roundRect">
+            <a:avLst>
+              <a:gd name="adj" fmla="val 6000"/>
+            </a:avLst>
+          </a:prstGeom>
+          <a:solidFill>
+            <a:srgbClr val="FFFFFF"/>
+          </a:solidFill>
+          <a:ln w="12700">
+            <a:solidFill>
+              <a:srgbClr val="E4E3DE"/>
+            </a:solidFill>
+          </a:ln>
+          <a:effectLst/>
+        </p:spPr>
+        <p:style>
+          <a:lnRef idx="1">
+            <a:schemeClr val="accent1"/>
+          </a:lnRef>
+          <a:fillRef idx="3">
+            <a:schemeClr val="accent1"/>
+          </a:fillRef>
+          <a:effectRef idx="2">
+            <a:schemeClr val="accent1"/>
+          </a:effectRef>
+          <a:fontRef idx="minor">
+            <a:schemeClr val="lt1"/>
+          </a:fontRef>
+        </p:style>
+        <p:txBody>
+          <a:bodyPr rtlCol="0" anchor="ctr"/>
+          <a:lstStyle/>
+          <a:p/>
+        </p:txBody>
+      </p:sp>
+      <p:sp>
+        <p:nvSpPr>
+          <p:cNvPr id="16" name="TarjetaTxt 2"/>
+          <p:cNvSpPr txBox="1"/>
+          <p:nvPr/>
+        </p:nvSpPr>
+        <p:spPr>
+          <a:xfrm>
+            <a:off x="6259068" y="2724912"/>
+            <a:ext cx="2526030" cy="788670"/>
+          </a:xfrm>
+          <a:prstGeom prst="rect">
+            <a:avLst/>
+          </a:prstGeom>
+          <a:noFill/>
+        </p:spPr>
+        <p:txBody>
+          <a:bodyPr wrap="square" anchor="t" lIns="45720" rIns="45720" tIns="27432" bIns="27432">
+            <a:normAutofit/>
+          </a:bodyPr>
+          <a:lstStyle/>
+          <a:p>
+            <a:pPr algn="l"/>
+            <a:r>
+              <a:rPr sz="1100" b="1">
+                <a:solidFill>
+                  <a:srgbClr val="5B3E83"/>
+                </a:solidFill>
+                <a:latin typeface="Bricolage Grotesque"/>
+              </a:rPr>
+              <a:t>PROHIBIDA</a:t>
+            </a:r>
+          </a:p>
+          <a:p>
+            <a:pPr algn="l"/>
+            <a:r>
+              <a:rPr sz="1000">
+                <a:solidFill>
+                  <a:srgbClr val="20242E"/>
+                </a:solidFill>
+                <a:latin typeface="Inter"/>
+              </a:rPr>
+              <a:t>like — → me gusta</a:t>
+            </a:r>
+          </a:p>
+        </p:txBody>
+      </p:sp>
+      <p:sp>
+        <p:nvSpPr>
+          <p:cNvPr id="17" name="Tarjeta 3"/>
+          <p:cNvSpPr/>
+          <p:nvPr/>
+        </p:nvSpPr>
+        <p:spPr>
+          <a:xfrm>
+            <a:off x="9022842" y="2670048"/>
+            <a:ext cx="2708910" cy="898398"/>
+          </a:xfrm>
+          <a:prstGeom prst="roundRect">
+            <a:avLst>
+              <a:gd name="adj" fmla="val 6000"/>
+            </a:avLst>
+          </a:prstGeom>
+          <a:solidFill>
+            <a:srgbClr val="FFFFFF"/>
+          </a:solidFill>
+          <a:ln w="12700">
+            <a:solidFill>
+              <a:srgbClr val="E4E3DE"/>
+            </a:solidFill>
+          </a:ln>
+          <a:effectLst/>
+        </p:spPr>
+        <p:style>
+          <a:lnRef idx="1">
+            <a:schemeClr val="accent1"/>
+          </a:lnRef>
+          <a:fillRef idx="3">
+            <a:schemeClr val="accent1"/>
+          </a:fillRef>
+          <a:effectRef idx="2">
+            <a:schemeClr val="accent1"/>
+          </a:effectRef>
+          <a:fontRef idx="minor">
+            <a:schemeClr val="lt1"/>
+          </a:fontRef>
+        </p:style>
+        <p:txBody>
+          <a:bodyPr rtlCol="0" anchor="ctr"/>
+          <a:lstStyle/>
+          <a:p/>
+        </p:txBody>
+      </p:sp>
+      <p:sp>
+        <p:nvSpPr>
+          <p:cNvPr id="18" name="TarjetaTxt 3"/>
+          <p:cNvSpPr txBox="1"/>
+          <p:nvPr/>
+        </p:nvSpPr>
+        <p:spPr>
+          <a:xfrm>
+            <a:off x="9114282" y="2724912"/>
+            <a:ext cx="2526030" cy="788670"/>
+          </a:xfrm>
+          <a:prstGeom prst="rect">
+            <a:avLst/>
+          </a:prstGeom>
+          <a:noFill/>
+        </p:spPr>
+        <p:txBody>
+          <a:bodyPr wrap="square" anchor="t" lIns="45720" rIns="45720" tIns="27432" bIns="27432">
+            <a:normAutofit/>
+          </a:bodyPr>
+          <a:lstStyle/>
+          <a:p>
+            <a:pPr algn="l"/>
+            <a:r>
+              <a:rPr sz="1100" b="1">
+                <a:solidFill>
+                  <a:srgbClr val="5B3E83"/>
+                </a:solidFill>
+                <a:latin typeface="Bricolage Grotesque"/>
+              </a:rPr>
+              <a:t>PROHIBIDA</a:t>
+            </a:r>
+          </a:p>
+          <a:p>
+            <a:pPr algn="l"/>
+            <a:r>
+              <a:rPr sz="1000">
+                <a:solidFill>
+                  <a:srgbClr val="20242E"/>
+                </a:solidFill>
+                <a:latin typeface="Inter"/>
+              </a:rPr>
+              <a:t>data / datos personales — → lo que el móvil sabe de ti</a:t>
+            </a:r>
+          </a:p>
+        </p:txBody>
+      </p:sp>
+      <p:sp>
+        <p:nvSpPr>
+          <p:cNvPr id="19" name="Tarjeta 4"/>
+          <p:cNvSpPr/>
+          <p:nvPr/>
+        </p:nvSpPr>
+        <p:spPr>
+          <a:xfrm>
+            <a:off x="457200" y="3696462"/>
+            <a:ext cx="2708910" cy="898398"/>
+          </a:xfrm>
+          <a:prstGeom prst="roundRect">
+            <a:avLst>
+              <a:gd name="adj" fmla="val 6000"/>
+            </a:avLst>
+          </a:prstGeom>
+          <a:solidFill>
+            <a:srgbClr val="FFFFFF"/>
+          </a:solidFill>
+          <a:ln w="12700">
+            <a:solidFill>
+              <a:srgbClr val="E4E3DE"/>
+            </a:solidFill>
+          </a:ln>
+          <a:effectLst/>
+        </p:spPr>
+        <p:style>
+          <a:lnRef idx="1">
+            <a:schemeClr val="accent1"/>
+          </a:lnRef>
+          <a:fillRef idx="3">
+            <a:schemeClr val="accent1"/>
+          </a:fillRef>
+          <a:effectRef idx="2">
+            <a:schemeClr val="accent1"/>
+          </a:effectRef>
+          <a:fontRef idx="minor">
+            <a:schemeClr val="lt1"/>
+          </a:fontRef>
+        </p:style>
+        <p:txBody>
+          <a:bodyPr rtlCol="0" anchor="ctr"/>
+          <a:lstStyle/>
+          <a:p/>
+        </p:txBody>
+      </p:sp>
+      <p:sp>
+        <p:nvSpPr>
+          <p:cNvPr id="20" name="TarjetaTxt 4"/>
+          <p:cNvSpPr txBox="1"/>
+          <p:nvPr/>
+        </p:nvSpPr>
+        <p:spPr>
+          <a:xfrm>
+            <a:off x="548640" y="3751326"/>
+            <a:ext cx="2526030" cy="788670"/>
+          </a:xfrm>
+          <a:prstGeom prst="rect">
+            <a:avLst/>
+          </a:prstGeom>
+          <a:noFill/>
+        </p:spPr>
+        <p:txBody>
+          <a:bodyPr wrap="square" anchor="t" lIns="45720" rIns="45720" tIns="27432" bIns="27432">
+            <a:normAutofit/>
+          </a:bodyPr>
+          <a:lstStyle/>
+          <a:p>
+            <a:pPr algn="l"/>
+            <a:r>
+              <a:rPr sz="1100" b="1">
+                <a:solidFill>
+                  <a:srgbClr val="5B3E83"/>
+                </a:solidFill>
+                <a:latin typeface="Bricolage Grotesque"/>
+              </a:rPr>
+              <a:t>PROHIBIDA</a:t>
+            </a:r>
+          </a:p>
+          <a:p>
+            <a:pPr algn="l"/>
+            <a:r>
+              <a:rPr sz="1000">
+                <a:solidFill>
+                  <a:srgbClr val="20242E"/>
+                </a:solidFill>
+                <a:latin typeface="Inter"/>
+              </a:rPr>
+              <a:t>engagement — → el tiempo que te quedas mirando</a:t>
+            </a:r>
+          </a:p>
+        </p:txBody>
+      </p:sp>
+      <p:sp>
+        <p:nvSpPr>
+          <p:cNvPr id="21" name="Tarjeta 5"/>
+          <p:cNvSpPr/>
+          <p:nvPr/>
+        </p:nvSpPr>
+        <p:spPr>
+          <a:xfrm>
+            <a:off x="3312414" y="3696462"/>
+            <a:ext cx="2708910" cy="898398"/>
+          </a:xfrm>
+          <a:prstGeom prst="roundRect">
+            <a:avLst>
+              <a:gd name="adj" fmla="val 6000"/>
+            </a:avLst>
+          </a:prstGeom>
+          <a:solidFill>
+            <a:srgbClr val="FFFFFF"/>
+          </a:solidFill>
+          <a:ln w="12700">
+            <a:solidFill>
+              <a:srgbClr val="E4E3DE"/>
+            </a:solidFill>
+          </a:ln>
+          <a:effectLst/>
+        </p:spPr>
+        <p:style>
+          <a:lnRef idx="1">
+            <a:schemeClr val="accent1"/>
+          </a:lnRef>
+          <a:fillRef idx="3">
+            <a:schemeClr val="accent1"/>
+          </a:fillRef>
+          <a:effectRef idx="2">
+            <a:schemeClr val="accent1"/>
+          </a:effectRef>
+          <a:fontRef idx="minor">
+            <a:schemeClr val="lt1"/>
+          </a:fontRef>
+        </p:style>
+        <p:txBody>
+          <a:bodyPr rtlCol="0" anchor="ctr"/>
+          <a:lstStyle/>
+          <a:p/>
+        </p:txBody>
+      </p:sp>
+      <p:sp>
+        <p:nvSpPr>
+          <p:cNvPr id="22" name="TarjetaTxt 5"/>
+          <p:cNvSpPr txBox="1"/>
+          <p:nvPr/>
+        </p:nvSpPr>
+        <p:spPr>
+          <a:xfrm>
+            <a:off x="3403854" y="3751326"/>
+            <a:ext cx="2526030" cy="788670"/>
+          </a:xfrm>
+          <a:prstGeom prst="rect">
+            <a:avLst/>
+          </a:prstGeom>
+          <a:noFill/>
+        </p:spPr>
+        <p:txBody>
+          <a:bodyPr wrap="square" anchor="t" lIns="45720" rIns="45720" tIns="27432" bIns="27432">
+            <a:normAutofit/>
+          </a:bodyPr>
+          <a:lstStyle/>
+          <a:p>
+            <a:pPr algn="l"/>
+            <a:r>
+              <a:rPr sz="1100" b="1">
+                <a:solidFill>
+                  <a:srgbClr val="5B3E83"/>
+                </a:solidFill>
+                <a:latin typeface="Bricolage Grotesque"/>
+              </a:rPr>
+              <a:t>PROHIBIDA</a:t>
+            </a:r>
+          </a:p>
+          <a:p>
+            <a:pPr algn="l"/>
+            <a:r>
+              <a:rPr sz="1000">
+                <a:solidFill>
+                  <a:srgbClr val="20242E"/>
+                </a:solidFill>
+                <a:latin typeface="Inter"/>
+              </a:rPr>
+              <a:t>recomendación personalizada — → lo que te enseña a ti y no a otro</a:t>
+            </a:r>
+          </a:p>
+        </p:txBody>
+      </p:sp>
+      <p:sp>
+        <p:nvSpPr>
+          <p:cNvPr id="23" name="Tarjeta 6"/>
+          <p:cNvSpPr/>
+          <p:nvPr/>
+        </p:nvSpPr>
+        <p:spPr>
+          <a:xfrm>
+            <a:off x="6167628" y="3696462"/>
+            <a:ext cx="2708910" cy="898398"/>
+          </a:xfrm>
+          <a:prstGeom prst="roundRect">
+            <a:avLst>
+              <a:gd name="adj" fmla="val 6000"/>
+            </a:avLst>
+          </a:prstGeom>
+          <a:solidFill>
+            <a:srgbClr val="FFFFFF"/>
+          </a:solidFill>
+          <a:ln w="12700">
+            <a:solidFill>
+              <a:srgbClr val="E4E3DE"/>
+            </a:solidFill>
+          </a:ln>
+          <a:effectLst/>
+        </p:spPr>
+        <p:style>
+          <a:lnRef idx="1">
+            <a:schemeClr val="accent1"/>
+          </a:lnRef>
+          <a:fillRef idx="3">
+            <a:schemeClr val="accent1"/>
+          </a:fillRef>
+          <a:effectRef idx="2">
+            <a:schemeClr val="accent1"/>
+          </a:effectRef>
+          <a:fontRef idx="minor">
+            <a:schemeClr val="lt1"/>
+          </a:fontRef>
+        </p:style>
+        <p:txBody>
+          <a:bodyPr rtlCol="0" anchor="ctr"/>
+          <a:lstStyle/>
+          <a:p/>
+        </p:txBody>
+      </p:sp>
+      <p:sp>
+        <p:nvSpPr>
+          <p:cNvPr id="24" name="TarjetaTxt 6"/>
+          <p:cNvSpPr txBox="1"/>
+          <p:nvPr/>
+        </p:nvSpPr>
+        <p:spPr>
+          <a:xfrm>
+            <a:off x="6259068" y="3751326"/>
+            <a:ext cx="2526030" cy="788670"/>
+          </a:xfrm>
+          <a:prstGeom prst="rect">
+            <a:avLst/>
+          </a:prstGeom>
+          <a:noFill/>
+        </p:spPr>
+        <p:txBody>
+          <a:bodyPr wrap="square" anchor="t" lIns="45720" rIns="45720" tIns="27432" bIns="27432">
+            <a:normAutofit/>
+          </a:bodyPr>
+          <a:lstStyle/>
+          <a:p>
+            <a:pPr algn="l"/>
+            <a:r>
+              <a:rPr sz="1100" b="1">
+                <a:solidFill>
+                  <a:srgbClr val="5B3E83"/>
+                </a:solidFill>
+                <a:latin typeface="Bricolage Grotesque"/>
+              </a:rPr>
+              <a:t>paso 1</a:t>
+            </a:r>
+          </a:p>
+          <a:p>
+            <a:pPr algn="l"/>
+            <a:r>
+              <a:rPr sz="1000">
+                <a:solidFill>
+                  <a:srgbClr val="20242E"/>
+                </a:solidFill>
+                <a:latin typeface="Inter"/>
+              </a:rPr>
+              <a:t>El móvil apunta lo que miras y cuánto tiempo.</a:t>
+            </a:r>
+          </a:p>
+        </p:txBody>
+      </p:sp>
+      <p:sp>
+        <p:nvSpPr>
+          <p:cNvPr id="25" name="Tarjeta 7"/>
+          <p:cNvSpPr/>
+          <p:nvPr/>
+        </p:nvSpPr>
+        <p:spPr>
+          <a:xfrm>
+            <a:off x="9022842" y="3696462"/>
+            <a:ext cx="2708910" cy="898398"/>
+          </a:xfrm>
+          <a:prstGeom prst="roundRect">
+            <a:avLst>
+              <a:gd name="adj" fmla="val 6000"/>
+            </a:avLst>
+          </a:prstGeom>
+          <a:solidFill>
+            <a:srgbClr val="FFFFFF"/>
+          </a:solidFill>
+          <a:ln w="12700">
+            <a:solidFill>
+              <a:srgbClr val="E4E3DE"/>
+            </a:solidFill>
+          </a:ln>
+          <a:effectLst/>
+        </p:spPr>
+        <p:style>
+          <a:lnRef idx="1">
+            <a:schemeClr val="accent1"/>
+          </a:lnRef>
+          <a:fillRef idx="3">
+            <a:schemeClr val="accent1"/>
+          </a:fillRef>
+          <a:effectRef idx="2">
+            <a:schemeClr val="accent1"/>
+          </a:effectRef>
+          <a:fontRef idx="minor">
+            <a:schemeClr val="lt1"/>
+          </a:fontRef>
+        </p:style>
+        <p:txBody>
+          <a:bodyPr rtlCol="0" anchor="ctr"/>
+          <a:lstStyle/>
+          <a:p/>
+        </p:txBody>
+      </p:sp>
+      <p:sp>
+        <p:nvSpPr>
+          <p:cNvPr id="26" name="TarjetaTxt 7"/>
+          <p:cNvSpPr txBox="1"/>
+          <p:nvPr/>
+        </p:nvSpPr>
+        <p:spPr>
+          <a:xfrm>
+            <a:off x="9114282" y="3751326"/>
+            <a:ext cx="2526030" cy="788670"/>
+          </a:xfrm>
+          <a:prstGeom prst="rect">
+            <a:avLst/>
+          </a:prstGeom>
+          <a:noFill/>
+        </p:spPr>
+        <p:txBody>
+          <a:bodyPr wrap="square" anchor="t" lIns="45720" rIns="45720" tIns="27432" bIns="27432">
+            <a:normAutofit/>
+          </a:bodyPr>
+          <a:lstStyle/>
+          <a:p>
+            <a:pPr algn="l"/>
+            <a:r>
+              <a:rPr sz="1100" b="1">
+                <a:solidFill>
+                  <a:srgbClr val="5B3E83"/>
+                </a:solidFill>
+                <a:latin typeface="Bricolage Grotesque"/>
+              </a:rPr>
+              <a:t>paso 2</a:t>
+            </a:r>
+          </a:p>
+          <a:p>
+            <a:pPr algn="l"/>
+            <a:r>
+              <a:rPr sz="1000">
+                <a:solidFill>
+                  <a:srgbClr val="20242E"/>
+                </a:solidFill>
+                <a:latin typeface="Inter"/>
+              </a:rPr>
+              <a:t>Lo compara con lo que miran otras personas parecidas.</a:t>
+            </a:r>
+          </a:p>
+        </p:txBody>
+      </p:sp>
+      <p:sp>
+        <p:nvSpPr>
+          <p:cNvPr id="27" name="Tarjeta 8"/>
+          <p:cNvSpPr/>
+          <p:nvPr/>
+        </p:nvSpPr>
+        <p:spPr>
+          <a:xfrm>
+            <a:off x="457200" y="4722876"/>
+            <a:ext cx="2708910" cy="898398"/>
+          </a:xfrm>
+          <a:prstGeom prst="roundRect">
+            <a:avLst>
+              <a:gd name="adj" fmla="val 6000"/>
+            </a:avLst>
+          </a:prstGeom>
+          <a:solidFill>
+            <a:srgbClr val="FFFFFF"/>
+          </a:solidFill>
+          <a:ln w="12700">
+            <a:solidFill>
+              <a:srgbClr val="E4E3DE"/>
+            </a:solidFill>
+          </a:ln>
+          <a:effectLst/>
+        </p:spPr>
+        <p:style>
+          <a:lnRef idx="1">
+            <a:schemeClr val="accent1"/>
+          </a:lnRef>
+          <a:fillRef idx="3">
+            <a:schemeClr val="accent1"/>
+          </a:fillRef>
+          <a:effectRef idx="2">
+            <a:schemeClr val="accent1"/>
+          </a:effectRef>
+          <a:fontRef idx="minor">
+            <a:schemeClr val="lt1"/>
+          </a:fontRef>
+        </p:style>
+        <p:txBody>
+          <a:bodyPr rtlCol="0" anchor="ctr"/>
+          <a:lstStyle/>
+          <a:p/>
+        </p:txBody>
+      </p:sp>
+      <p:sp>
+        <p:nvSpPr>
+          <p:cNvPr id="28" name="TarjetaTxt 8"/>
+          <p:cNvSpPr txBox="1"/>
+          <p:nvPr/>
+        </p:nvSpPr>
+        <p:spPr>
+          <a:xfrm>
+            <a:off x="548640" y="4777740"/>
+            <a:ext cx="2526030" cy="788670"/>
+          </a:xfrm>
+          <a:prstGeom prst="rect">
+            <a:avLst/>
+          </a:prstGeom>
+          <a:noFill/>
+        </p:spPr>
+        <p:txBody>
+          <a:bodyPr wrap="square" anchor="t" lIns="45720" rIns="45720" tIns="27432" bIns="27432">
+            <a:normAutofit/>
+          </a:bodyPr>
+          <a:lstStyle/>
+          <a:p>
+            <a:pPr algn="l"/>
+            <a:r>
+              <a:rPr sz="1100" b="1">
+                <a:solidFill>
+                  <a:srgbClr val="5B3E83"/>
+                </a:solidFill>
+                <a:latin typeface="Bricolage Grotesque"/>
+              </a:rPr>
+              <a:t>paso 3</a:t>
+            </a:r>
+          </a:p>
+          <a:p>
+            <a:pPr algn="l"/>
+            <a:r>
+              <a:rPr sz="1000">
+                <a:solidFill>
+                  <a:srgbClr val="20242E"/>
+                </a:solidFill>
+                <a:latin typeface="Inter"/>
+              </a:rPr>
+              <a:t>Te enseña más de lo que te hace quedarte.</a:t>
+            </a:r>
+          </a:p>
+        </p:txBody>
+      </p:sp>
+      <p:sp>
+        <p:nvSpPr>
+          <p:cNvPr id="29" name="Tarjeta 9"/>
+          <p:cNvSpPr/>
+          <p:nvPr/>
+        </p:nvSpPr>
+        <p:spPr>
+          <a:xfrm>
+            <a:off x="3312414" y="4722876"/>
+            <a:ext cx="2708910" cy="898398"/>
+          </a:xfrm>
+          <a:prstGeom prst="roundRect">
+            <a:avLst>
+              <a:gd name="adj" fmla="val 6000"/>
+            </a:avLst>
+          </a:prstGeom>
+          <a:solidFill>
+            <a:srgbClr val="FFFFFF"/>
+          </a:solidFill>
+          <a:ln w="12700">
+            <a:solidFill>
+              <a:srgbClr val="E4E3DE"/>
+            </a:solidFill>
+          </a:ln>
+          <a:effectLst/>
+        </p:spPr>
+        <p:style>
+          <a:lnRef idx="1">
+            <a:schemeClr val="accent1"/>
+          </a:lnRef>
+          <a:fillRef idx="3">
+            <a:schemeClr val="accent1"/>
+          </a:fillRef>
+          <a:effectRef idx="2">
+            <a:schemeClr val="accent1"/>
+          </a:effectRef>
+          <a:fontRef idx="minor">
+            <a:schemeClr val="lt1"/>
+          </a:fontRef>
+        </p:style>
+        <p:txBody>
+          <a:bodyPr rtlCol="0" anchor="ctr"/>
+          <a:lstStyle/>
+          <a:p/>
+        </p:txBody>
+      </p:sp>
+      <p:sp>
+        <p:nvSpPr>
+          <p:cNvPr id="30" name="TarjetaTxt 9"/>
+          <p:cNvSpPr txBox="1"/>
+          <p:nvPr/>
+        </p:nvSpPr>
+        <p:spPr>
+          <a:xfrm>
+            <a:off x="3403854" y="4777740"/>
+            <a:ext cx="2526030" cy="788670"/>
+          </a:xfrm>
+          <a:prstGeom prst="rect">
+            <a:avLst/>
+          </a:prstGeom>
+          <a:noFill/>
+        </p:spPr>
+        <p:txBody>
+          <a:bodyPr wrap="square" anchor="t" lIns="45720" rIns="45720" tIns="27432" bIns="27432">
+            <a:normAutofit/>
+          </a:bodyPr>
+          <a:lstStyle/>
+          <a:p>
+            <a:pPr algn="l"/>
+            <a:r>
+              <a:rPr sz="1100" b="1">
+                <a:solidFill>
+                  <a:srgbClr val="5B3E83"/>
+                </a:solidFill>
+                <a:latin typeface="Bricolage Grotesque"/>
+              </a:rPr>
+              <a:t>paso 4</a:t>
+            </a:r>
+          </a:p>
+          <a:p>
+            <a:pPr algn="l"/>
+            <a:r>
+              <a:rPr sz="1000">
+                <a:solidFill>
+                  <a:srgbClr val="20242E"/>
+                </a:solidFill>
+                <a:latin typeface="Inter"/>
+              </a:rPr>
+              <a:t>Por eso a ti y a mí no nos sale lo mismo.</a:t>
+            </a:r>
+          </a:p>
+        </p:txBody>
+      </p:sp>
+      <p:sp>
+        <p:nvSpPr>
+          <p:cNvPr id="31" name="Tarjeta 10"/>
+          <p:cNvSpPr/>
+          <p:nvPr/>
+        </p:nvSpPr>
+        <p:spPr>
+          <a:xfrm>
+            <a:off x="6167628" y="4722876"/>
+            <a:ext cx="2708910" cy="898398"/>
+          </a:xfrm>
+          <a:prstGeom prst="roundRect">
+            <a:avLst>
+              <a:gd name="adj" fmla="val 6000"/>
+            </a:avLst>
+          </a:prstGeom>
+          <a:solidFill>
+            <a:srgbClr val="FFFFFF"/>
+          </a:solidFill>
+          <a:ln w="12700">
+            <a:solidFill>
+              <a:srgbClr val="E4E3DE"/>
+            </a:solidFill>
+          </a:ln>
+          <a:effectLst/>
+        </p:spPr>
+        <p:style>
+          <a:lnRef idx="1">
+            <a:schemeClr val="accent1"/>
+          </a:lnRef>
+          <a:fillRef idx="3">
+            <a:schemeClr val="accent1"/>
+          </a:fillRef>
+          <a:effectRef idx="2">
+            <a:schemeClr val="accent1"/>
+          </a:effectRef>
+          <a:fontRef idx="minor">
+            <a:schemeClr val="lt1"/>
+          </a:fontRef>
+        </p:style>
+        <p:txBody>
+          <a:bodyPr rtlCol="0" anchor="ctr"/>
+          <a:lstStyle/>
+          <a:p/>
+        </p:txBody>
+      </p:sp>
+      <p:sp>
+        <p:nvSpPr>
+          <p:cNvPr id="32" name="TarjetaTxt 10"/>
+          <p:cNvSpPr txBox="1"/>
+          <p:nvPr/>
+        </p:nvSpPr>
+        <p:spPr>
+          <a:xfrm>
+            <a:off x="6259068" y="4777740"/>
+            <a:ext cx="2526030" cy="788670"/>
+          </a:xfrm>
+          <a:prstGeom prst="rect">
+            <a:avLst/>
+          </a:prstGeom>
+          <a:noFill/>
+        </p:spPr>
+        <p:txBody>
+          <a:bodyPr wrap="square" anchor="t" lIns="45720" rIns="45720" tIns="27432" bIns="27432">
+            <a:normAutofit/>
+          </a:bodyPr>
+          <a:lstStyle/>
+          <a:p>
+            <a:pPr algn="l"/>
+            <a:r>
+              <a:rPr sz="1100" b="1">
+                <a:solidFill>
+                  <a:srgbClr val="5B3E83"/>
+                </a:solidFill>
+                <a:latin typeface="Bricolage Grotesque"/>
+              </a:rPr>
+              <a:t>paso 5</a:t>
+            </a:r>
+          </a:p>
+          <a:p>
+            <a:pPr algn="l"/>
+            <a:r>
+              <a:rPr sz="1000">
+                <a:solidFill>
+                  <a:srgbClr val="20242E"/>
+                </a:solidFill>
+                <a:latin typeface="Inter"/>
+              </a:rPr>
+              <a:t>Y por eso a veces parece que te lee la mente.</a:t>
+            </a:r>
+          </a:p>
+        </p:txBody>
+      </p:sp>
+      <p:sp>
+        <p:nvSpPr>
+          <p:cNvPr id="33" name="Tarjeta 11"/>
+          <p:cNvSpPr/>
+          <p:nvPr/>
+        </p:nvSpPr>
+        <p:spPr>
+          <a:xfrm>
+            <a:off x="9022842" y="4722876"/>
+            <a:ext cx="2708910" cy="898398"/>
+          </a:xfrm>
+          <a:prstGeom prst="roundRect">
+            <a:avLst>
+              <a:gd name="adj" fmla="val 6000"/>
+            </a:avLst>
+          </a:prstGeom>
+          <a:solidFill>
+            <a:srgbClr val="FFFFFF"/>
+          </a:solidFill>
+          <a:ln w="12700">
+            <a:solidFill>
+              <a:srgbClr val="E4E3DE"/>
+            </a:solidFill>
+          </a:ln>
+          <a:effectLst/>
+        </p:spPr>
+        <p:style>
+          <a:lnRef idx="1">
+            <a:schemeClr val="accent1"/>
+          </a:lnRef>
+          <a:fillRef idx="3">
+            <a:schemeClr val="accent1"/>
+          </a:fillRef>
+          <a:effectRef idx="2">
+            <a:schemeClr val="accent1"/>
+          </a:effectRef>
+          <a:fontRef idx="minor">
+            <a:schemeClr val="lt1"/>
+          </a:fontRef>
+        </p:style>
+        <p:txBody>
+          <a:bodyPr rtlCol="0" anchor="ctr"/>
+          <a:lstStyle/>
+          <a:p/>
+        </p:txBody>
+      </p:sp>
+      <p:sp>
+        <p:nvSpPr>
+          <p:cNvPr id="34" name="TarjetaTxt 11"/>
+          <p:cNvSpPr txBox="1"/>
+          <p:nvPr/>
+        </p:nvSpPr>
+        <p:spPr>
+          <a:xfrm>
+            <a:off x="9114282" y="4777740"/>
+            <a:ext cx="2526030" cy="788670"/>
+          </a:xfrm>
+          <a:prstGeom prst="rect">
+            <a:avLst/>
+          </a:prstGeom>
+          <a:noFill/>
+        </p:spPr>
+        <p:txBody>
+          <a:bodyPr wrap="square" anchor="t" lIns="45720" rIns="45720" tIns="27432" bIns="27432">
+            <a:normAutofit/>
+          </a:bodyPr>
+          <a:lstStyle/>
+          <a:p>
+            <a:pPr algn="l"/>
+            <a:r>
+              <a:rPr sz="1100" b="1">
+                <a:solidFill>
+                  <a:srgbClr val="5B3E83"/>
+                </a:solidFill>
+                <a:latin typeface="Bricolage Grotesque"/>
+              </a:rPr>
+              <a:t>marco</a:t>
+            </a:r>
+          </a:p>
+          <a:p>
+            <a:pPr algn="l"/>
+            <a:r>
+              <a:rPr sz="1000">
+                <a:solidFill>
+                  <a:srgbClr val="20242E"/>
+                </a:solidFill>
+                <a:latin typeface="Inter"/>
+              </a:rPr>
+              <a:t>Es como si … , pero con …</a:t>
+            </a:r>
+          </a:p>
+        </p:txBody>
+      </p:sp>
+      <p:sp>
+        <p:nvSpPr>
+          <p:cNvPr id="35" name="Tarjeta 12"/>
+          <p:cNvSpPr/>
+          <p:nvPr/>
+        </p:nvSpPr>
+        <p:spPr>
+          <a:xfrm>
+            <a:off x="457200" y="5749290"/>
+            <a:ext cx="2708910" cy="898398"/>
+          </a:xfrm>
+          <a:prstGeom prst="roundRect">
+            <a:avLst>
+              <a:gd name="adj" fmla="val 6000"/>
+            </a:avLst>
+          </a:prstGeom>
+          <a:solidFill>
+            <a:srgbClr val="FFFFFF"/>
+          </a:solidFill>
+          <a:ln w="12700">
+            <a:solidFill>
+              <a:srgbClr val="E4E3DE"/>
+            </a:solidFill>
+          </a:ln>
+          <a:effectLst/>
+        </p:spPr>
+        <p:style>
+          <a:lnRef idx="1">
+            <a:schemeClr val="accent1"/>
+          </a:lnRef>
+          <a:fillRef idx="3">
+            <a:schemeClr val="accent1"/>
+          </a:fillRef>
+          <a:effectRef idx="2">
+            <a:schemeClr val="accent1"/>
+          </a:effectRef>
+          <a:fontRef idx="minor">
+            <a:schemeClr val="lt1"/>
+          </a:fontRef>
+        </p:style>
+        <p:txBody>
+          <a:bodyPr rtlCol="0" anchor="ctr"/>
+          <a:lstStyle/>
+          <a:p/>
+        </p:txBody>
+      </p:sp>
+      <p:sp>
+        <p:nvSpPr>
+          <p:cNvPr id="36" name="TarjetaTxt 12"/>
+          <p:cNvSpPr txBox="1"/>
+          <p:nvPr/>
+        </p:nvSpPr>
+        <p:spPr>
+          <a:xfrm>
+            <a:off x="548640" y="5804154"/>
+            <a:ext cx="2526030" cy="788670"/>
+          </a:xfrm>
+          <a:prstGeom prst="rect">
+            <a:avLst/>
+          </a:prstGeom>
+          <a:noFill/>
+        </p:spPr>
+        <p:txBody>
+          <a:bodyPr wrap="square" anchor="t" lIns="45720" rIns="45720" tIns="27432" bIns="27432">
+            <a:normAutofit/>
+          </a:bodyPr>
+          <a:lstStyle/>
+          <a:p>
+            <a:pPr algn="l"/>
+            <a:r>
+              <a:rPr sz="1100" b="1">
+                <a:solidFill>
+                  <a:srgbClr val="5B3E83"/>
+                </a:solidFill>
+                <a:latin typeface="Bricolage Grotesque"/>
+              </a:rPr>
+              <a:t>marco</a:t>
+            </a:r>
+          </a:p>
+          <a:p>
+            <a:pPr algn="l"/>
+            <a:r>
+              <a:rPr sz="1000">
+                <a:solidFill>
+                  <a:srgbClr val="20242E"/>
+                </a:solidFill>
+                <a:latin typeface="Inter"/>
+              </a:rPr>
+              <a:t>No es magia: es que …</a:t>
+            </a:r>
+          </a:p>
+        </p:txBody>
+      </p:sp>
+      <p:sp>
+        <p:nvSpPr>
+          <p:cNvPr id="37" name="Tarjeta 13"/>
+          <p:cNvSpPr/>
+          <p:nvPr/>
+        </p:nvSpPr>
+        <p:spPr>
+          <a:xfrm>
+            <a:off x="3312414" y="5749290"/>
+            <a:ext cx="2708910" cy="898398"/>
+          </a:xfrm>
+          <a:prstGeom prst="roundRect">
+            <a:avLst>
+              <a:gd name="adj" fmla="val 6000"/>
+            </a:avLst>
+          </a:prstGeom>
+          <a:solidFill>
+            <a:srgbClr val="FFFFFF"/>
+          </a:solidFill>
+          <a:ln w="12700">
+            <a:solidFill>
+              <a:srgbClr val="E4E3DE"/>
+            </a:solidFill>
+          </a:ln>
+          <a:effectLst/>
+        </p:spPr>
+        <p:style>
+          <a:lnRef idx="1">
+            <a:schemeClr val="accent1"/>
+          </a:lnRef>
+          <a:fillRef idx="3">
+            <a:schemeClr val="accent1"/>
+          </a:fillRef>
+          <a:effectRef idx="2">
+            <a:schemeClr val="accent1"/>
+          </a:effectRef>
+          <a:fontRef idx="minor">
+            <a:schemeClr val="lt1"/>
+          </a:fontRef>
+        </p:style>
+        <p:txBody>
+          <a:bodyPr rtlCol="0" anchor="ctr"/>
+          <a:lstStyle/>
+          <a:p/>
+        </p:txBody>
+      </p:sp>
+      <p:sp>
+        <p:nvSpPr>
+          <p:cNvPr id="38" name="TarjetaTxt 13"/>
+          <p:cNvSpPr txBox="1"/>
+          <p:nvPr/>
+        </p:nvSpPr>
+        <p:spPr>
+          <a:xfrm>
+            <a:off x="3403854" y="5804154"/>
+            <a:ext cx="2526030" cy="788670"/>
+          </a:xfrm>
+          <a:prstGeom prst="rect">
+            <a:avLst/>
+          </a:prstGeom>
+          <a:noFill/>
+        </p:spPr>
+        <p:txBody>
+          <a:bodyPr wrap="square" anchor="t" lIns="45720" rIns="45720" tIns="27432" bIns="27432">
+            <a:normAutofit/>
+          </a:bodyPr>
+          <a:lstStyle/>
+          <a:p>
+            <a:pPr algn="l"/>
+            <a:r>
+              <a:rPr sz="1100" b="1">
+                <a:solidFill>
+                  <a:srgbClr val="5B3E83"/>
+                </a:solidFill>
+                <a:latin typeface="Bricolage Grotesque"/>
+              </a:rPr>
+              <a:t>marco</a:t>
+            </a:r>
+          </a:p>
+          <a:p>
+            <a:pPr algn="l"/>
+            <a:r>
+              <a:rPr sz="1000">
+                <a:solidFill>
+                  <a:srgbClr val="20242E"/>
+                </a:solidFill>
+                <a:latin typeface="Inter"/>
+              </a:rPr>
+              <a:t>Cuanto más …, más …</a:t>
+            </a:r>
+          </a:p>
+        </p:txBody>
+      </p:sp>
+      <p:sp>
+        <p:nvSpPr>
+          <p:cNvPr id="39" name="Tarjeta 14"/>
+          <p:cNvSpPr/>
+          <p:nvPr/>
+        </p:nvSpPr>
+        <p:spPr>
+          <a:xfrm>
+            <a:off x="6167628" y="5749290"/>
+            <a:ext cx="2708910" cy="898398"/>
+          </a:xfrm>
+          <a:prstGeom prst="roundRect">
+            <a:avLst>
+              <a:gd name="adj" fmla="val 6000"/>
+            </a:avLst>
+          </a:prstGeom>
+          <a:solidFill>
+            <a:srgbClr val="FFFFFF"/>
+          </a:solidFill>
+          <a:ln w="12700">
+            <a:solidFill>
+              <a:srgbClr val="E4E3DE"/>
+            </a:solidFill>
+          </a:ln>
+          <a:effectLst/>
+        </p:spPr>
+        <p:style>
+          <a:lnRef idx="1">
+            <a:schemeClr val="accent1"/>
+          </a:lnRef>
+          <a:fillRef idx="3">
+            <a:schemeClr val="accent1"/>
+          </a:fillRef>
+          <a:effectRef idx="2">
+            <a:schemeClr val="accent1"/>
+          </a:effectRef>
+          <a:fontRef idx="minor">
+            <a:schemeClr val="lt1"/>
+          </a:fontRef>
+        </p:style>
+        <p:txBody>
+          <a:bodyPr rtlCol="0" anchor="ctr"/>
+          <a:lstStyle/>
+          <a:p/>
+        </p:txBody>
+      </p:sp>
+      <p:sp>
+        <p:nvSpPr>
+          <p:cNvPr id="40" name="TarjetaTxt 14"/>
+          <p:cNvSpPr txBox="1"/>
+          <p:nvPr/>
+        </p:nvSpPr>
+        <p:spPr>
+          <a:xfrm>
+            <a:off x="6259068" y="5804154"/>
+            <a:ext cx="2526030" cy="788670"/>
+          </a:xfrm>
+          <a:prstGeom prst="rect">
+            <a:avLst/>
+          </a:prstGeom>
+          <a:noFill/>
+        </p:spPr>
+        <p:txBody>
+          <a:bodyPr wrap="square" anchor="t" lIns="45720" rIns="45720" tIns="27432" bIns="27432">
+            <a:normAutofit/>
+          </a:bodyPr>
+          <a:lstStyle/>
+          <a:p>
+            <a:pPr algn="l"/>
+            <a:r>
+              <a:rPr sz="1100" b="1">
+                <a:solidFill>
+                  <a:srgbClr val="5B3E83"/>
+                </a:solidFill>
+                <a:latin typeface="Bricolage Grotesque"/>
+              </a:rPr>
+              <a:t>marco</a:t>
+            </a:r>
+          </a:p>
+          <a:p>
+            <a:pPr algn="l"/>
+            <a:r>
+              <a:rPr sz="1000">
+                <a:solidFill>
+                  <a:srgbClr val="20242E"/>
+                </a:solidFill>
+                <a:latin typeface="Inter"/>
+              </a:rPr>
+              <a:t>A ti te sale … y a mí …</a:t>
+            </a:r>
+          </a:p>
+        </p:txBody>
+      </p:sp>
+    </p:spTree>
+  </p:cSld>
+  <p:clrMapOvr>
+    <a:masterClrMapping/>
+  </p:clrMapOvr>
+</p:sld>
+</file>
+
+<file path=ppt/slides/slide24.xml><?xml version="1.0" encoding="utf-8"?>
+<p:sld xmlns:a="http://schemas.openxmlformats.org/drawingml/2006/main" xmlns:p="http://schemas.openxmlformats.org/presentationml/2006/main" xmlns:r="http://schemas.openxmlformats.org/officeDocument/2006/relationships">
+  <p:cSld>
+    <p:spTree>
+      <p:nvGrpSpPr>
+        <p:cNvPr id="1" name=""/>
+        <p:cNvGrpSpPr/>
+        <p:nvPr/>
+      </p:nvGrpSpPr>
+      <p:grpSpPr/>
+      <p:sp>
+        <p:nvSpPr>
+          <p:cNvPr id="2" name="Fondo"/>
+          <p:cNvSpPr/>
+          <p:nvPr/>
+        </p:nvSpPr>
+        <p:spPr>
+          <a:xfrm>
+            <a:off x="0" y="0"/>
+            <a:ext cx="12191695" cy="6858000"/>
+          </a:xfrm>
+          <a:prstGeom prst="rect">
+            <a:avLst/>
+          </a:prstGeom>
+          <a:solidFill>
+            <a:srgbClr val="FCFBF8"/>
+          </a:solidFill>
+          <a:ln>
+            <a:noFill/>
+          </a:ln>
+          <a:effectLst/>
+        </p:spPr>
+        <p:style>
+          <a:lnRef idx="1">
+            <a:schemeClr val="accent1"/>
+          </a:lnRef>
+          <a:fillRef idx="3">
+            <a:schemeClr val="accent1"/>
+          </a:fillRef>
+          <a:effectRef idx="2">
+            <a:schemeClr val="accent1"/>
+          </a:effectRef>
+          <a:fontRef idx="minor">
+            <a:schemeClr val="lt1"/>
+          </a:fontRef>
+        </p:style>
+        <p:txBody>
+          <a:bodyPr rtlCol="0" anchor="ctr"/>
+          <a:lstStyle/>
+          <a:p/>
+        </p:txBody>
+      </p:sp>
+      <p:sp>
+        <p:nvSpPr>
+          <p:cNvPr id="3" name="Cabecera"/>
+          <p:cNvSpPr/>
+          <p:nvPr/>
+        </p:nvSpPr>
+        <p:spPr>
+          <a:xfrm>
+            <a:off x="0" y="0"/>
+            <a:ext cx="12191695" cy="1078992"/>
+          </a:xfrm>
+          <a:prstGeom prst="rect">
+            <a:avLst/>
+          </a:prstGeom>
+          <a:solidFill>
+            <a:srgbClr val="7C56A9"/>
+          </a:solidFill>
+          <a:ln>
+            <a:noFill/>
+          </a:ln>
+          <a:effectLst/>
+        </p:spPr>
+        <p:style>
+          <a:lnRef idx="1">
+            <a:schemeClr val="accent1"/>
+          </a:lnRef>
+          <a:fillRef idx="3">
+            <a:schemeClr val="accent1"/>
+          </a:fillRef>
+          <a:effectRef idx="2">
+            <a:schemeClr val="accent1"/>
+          </a:effectRef>
+          <a:fontRef idx="minor">
+            <a:schemeClr val="lt1"/>
+          </a:fontRef>
+        </p:style>
+        <p:txBody>
+          <a:bodyPr rtlCol="0" anchor="ctr"/>
+          <a:lstStyle/>
+          <a:p/>
+        </p:txBody>
+      </p:sp>
+      <p:sp>
+        <p:nvSpPr>
+          <p:cNvPr id="4" name="Chip"/>
+          <p:cNvSpPr/>
+          <p:nvPr/>
+        </p:nvSpPr>
+        <p:spPr>
+          <a:xfrm>
+            <a:off x="457200" y="182880"/>
+            <a:ext cx="3017520" cy="292608"/>
+          </a:xfrm>
+          <a:prstGeom prst="roundRect">
+            <a:avLst>
+              <a:gd name="adj" fmla="val 50000"/>
+            </a:avLst>
+          </a:prstGeom>
+          <a:solidFill>
+            <a:srgbClr val="FFFFFF"/>
+          </a:solidFill>
+          <a:ln>
+            <a:noFill/>
+          </a:ln>
+          <a:effectLst/>
+        </p:spPr>
+        <p:style>
+          <a:lnRef idx="1">
+            <a:schemeClr val="accent1"/>
+          </a:lnRef>
+          <a:fillRef idx="3">
+            <a:schemeClr val="accent1"/>
+          </a:fillRef>
+          <a:effectRef idx="2">
+            <a:schemeClr val="accent1"/>
+          </a:effectRef>
+          <a:fontRef idx="minor">
+            <a:schemeClr val="lt1"/>
+          </a:fontRef>
+        </p:style>
+        <p:txBody>
+          <a:bodyPr rtlCol="0" anchor="ctr"/>
+          <a:lstStyle/>
+          <a:p/>
+        </p:txBody>
+      </p:sp>
+      <p:sp>
+        <p:nvSpPr>
+          <p:cNvPr id="5" name="ChipTxt"/>
+          <p:cNvSpPr txBox="1"/>
+          <p:nvPr/>
+        </p:nvSpPr>
+        <p:spPr>
+          <a:xfrm>
+            <a:off x="457200" y="173736"/>
+            <a:ext cx="3017520" cy="310896"/>
+          </a:xfrm>
+          <a:prstGeom prst="rect">
+            <a:avLst/>
+          </a:prstGeom>
+          <a:noFill/>
+        </p:spPr>
+        <p:txBody>
+          <a:bodyPr wrap="square" anchor="ctr" lIns="45720" rIns="45720" tIns="27432" bIns="27432">
+            <a:normAutofit/>
+          </a:bodyPr>
+          <a:lstStyle/>
+          <a:p>
+            <a:pPr algn="ctr"/>
+            <a:r>
+              <a:rPr sz="950" b="1">
+                <a:solidFill>
+                  <a:srgbClr val="5B3E83"/>
+                </a:solidFill>
+                <a:latin typeface="Inter"/>
+              </a:rPr>
+              <a:t>RETO 6 · PUZZEL &amp; ESCAPE</a:t>
+            </a:r>
+          </a:p>
+        </p:txBody>
+      </p:sp>
+      <p:sp>
+        <p:nvSpPr>
+          <p:cNvPr id="6" name="Titulo"/>
+          <p:cNvSpPr txBox="1"/>
+          <p:nvPr/>
+        </p:nvSpPr>
+        <p:spPr>
+          <a:xfrm>
+            <a:off x="457200" y="502920"/>
+            <a:ext cx="8412480" cy="475488"/>
+          </a:xfrm>
+          <a:prstGeom prst="rect">
+            <a:avLst/>
+          </a:prstGeom>
+          <a:noFill/>
+        </p:spPr>
+        <p:txBody>
+          <a:bodyPr wrap="square" anchor="t" lIns="45720" rIns="45720" tIns="27432" bIns="27432">
+            <a:normAutofit/>
+          </a:bodyPr>
+          <a:lstStyle/>
+          <a:p>
+            <a:pPr algn="l"/>
+            <a:r>
+              <a:rPr sz="2700" b="1">
+                <a:solidFill>
+                  <a:srgbClr val="FFFFFF"/>
+                </a:solidFill>
+                <a:latin typeface="Bricolage Grotesque"/>
+              </a:rPr>
+              <a:t>La cadena de favores</a:t>
+            </a:r>
+          </a:p>
+        </p:txBody>
+      </p:sp>
+      <p:sp>
+        <p:nvSpPr>
+          <p:cNvPr id="7" name="Badges"/>
+          <p:cNvSpPr txBox="1"/>
+          <p:nvPr/>
+        </p:nvSpPr>
+        <p:spPr>
+          <a:xfrm>
+            <a:off x="9052560" y="256032"/>
+            <a:ext cx="2651760" cy="640080"/>
+          </a:xfrm>
+          <a:prstGeom prst="rect">
+            <a:avLst/>
+          </a:prstGeom>
+          <a:noFill/>
+        </p:spPr>
+        <p:txBody>
+          <a:bodyPr wrap="square" anchor="t" lIns="45720" rIns="45720" tIns="27432" bIns="27432">
+            <a:normAutofit/>
+          </a:bodyPr>
+          <a:lstStyle/>
+          <a:p>
+            <a:pPr algn="r"/>
+            <a:r>
+              <a:rPr sz="1000">
+                <a:solidFill>
+                  <a:srgbClr val="EEE8F5"/>
+                </a:solidFill>
+                <a:latin typeface="Inter"/>
+              </a:rPr>
+              <a:t>🏫 Toda la clase</a:t>
+            </a:r>
+          </a:p>
+          <a:p>
+            <a:pPr algn="r"/>
+            <a:r>
+              <a:rPr sz="1000">
+                <a:solidFill>
+                  <a:srgbClr val="EEE8F5"/>
+                </a:solidFill>
+                <a:latin typeface="Inter"/>
+              </a:rPr>
+              <a:t>± 15 min · ★★★</a:t>
+            </a:r>
+          </a:p>
+        </p:txBody>
+      </p:sp>
+      <p:sp>
+        <p:nvSpPr>
+          <p:cNvPr id="8" name="Gancho"/>
+          <p:cNvSpPr txBox="1"/>
+          <p:nvPr/>
+        </p:nvSpPr>
+        <p:spPr>
+          <a:xfrm>
+            <a:off x="457200" y="1225296"/>
+            <a:ext cx="11274552" cy="566928"/>
+          </a:xfrm>
+          <a:prstGeom prst="rect">
+            <a:avLst/>
+          </a:prstGeom>
+          <a:noFill/>
+        </p:spPr>
+        <p:txBody>
+          <a:bodyPr wrap="square" anchor="t" lIns="45720" rIns="45720" tIns="27432" bIns="27432">
+            <a:normAutofit/>
+          </a:bodyPr>
+          <a:lstStyle/>
+          <a:p>
+            <a:pPr algn="l"/>
+            <a:r>
+              <a:rPr sz="1600" b="1">
+                <a:solidFill>
+                  <a:srgbClr val="5B3E83"/>
+                </a:solidFill>
+                <a:latin typeface="Bricolage Grotesque"/>
+              </a:rPr>
+              <a:t>Un favor recorre la clase entera. Y tiene que volver.</a:t>
+            </a:r>
+          </a:p>
+          <a:p>
+            <a:pPr algn="l"/>
+            <a:r>
+              <a:rPr sz="1100" i="1">
+                <a:solidFill>
+                  <a:srgbClr val="6A6E78"/>
+                </a:solidFill>
+                <a:latin typeface="Inter"/>
+              </a:rPr>
+              <a:t>Eén gunst gaat de hele klas rond. En hij moet terugkomen.</a:t>
+            </a:r>
+          </a:p>
+        </p:txBody>
+      </p:sp>
+      <p:sp>
+        <p:nvSpPr>
+          <p:cNvPr id="9" name="ReglaCaja"/>
+          <p:cNvSpPr/>
+          <p:nvPr/>
+        </p:nvSpPr>
+        <p:spPr>
+          <a:xfrm>
+            <a:off x="457200" y="1847088"/>
+            <a:ext cx="11274552" cy="658368"/>
+          </a:xfrm>
+          <a:prstGeom prst="roundRect">
+            <a:avLst>
+              <a:gd name="adj" fmla="val 5000"/>
+            </a:avLst>
+          </a:prstGeom>
+          <a:solidFill>
+            <a:srgbClr val="FBF3D6"/>
+          </a:solidFill>
+          <a:ln>
+            <a:noFill/>
+          </a:ln>
+          <a:effectLst/>
+        </p:spPr>
+        <p:style>
+          <a:lnRef idx="1">
+            <a:schemeClr val="accent1"/>
+          </a:lnRef>
+          <a:fillRef idx="3">
+            <a:schemeClr val="accent1"/>
+          </a:fillRef>
+          <a:effectRef idx="2">
+            <a:schemeClr val="accent1"/>
+          </a:effectRef>
+          <a:fontRef idx="minor">
+            <a:schemeClr val="lt1"/>
+          </a:fontRef>
+        </p:style>
+        <p:txBody>
+          <a:bodyPr rtlCol="0" anchor="ctr"/>
+          <a:lstStyle/>
+          <a:p/>
+        </p:txBody>
+      </p:sp>
+      <p:sp>
+        <p:nvSpPr>
+          <p:cNvPr id="10" name="ReglaTxt"/>
+          <p:cNvSpPr txBox="1"/>
+          <p:nvPr/>
+        </p:nvSpPr>
+        <p:spPr>
+          <a:xfrm>
+            <a:off x="603504" y="1883664"/>
+            <a:ext cx="10972800" cy="585216"/>
+          </a:xfrm>
+          <a:prstGeom prst="rect">
+            <a:avLst/>
+          </a:prstGeom>
+          <a:noFill/>
+        </p:spPr>
+        <p:txBody>
+          <a:bodyPr wrap="square" anchor="t" lIns="45720" rIns="45720" tIns="27432" bIns="27432">
+            <a:normAutofit/>
+          </a:bodyPr>
+          <a:lstStyle/>
+          <a:p>
+            <a:pPr algn="l"/>
+            <a:r>
+              <a:rPr sz="850" b="1">
+                <a:solidFill>
+                  <a:srgbClr val="B7860B"/>
+                </a:solidFill>
+                <a:latin typeface="Inter"/>
+              </a:rPr>
+              <a:t>LA REGLA DEL RETO</a:t>
+            </a:r>
+          </a:p>
+          <a:p>
+            <a:pPr algn="l"/>
+            <a:r>
+              <a:rPr sz="1100">
+                <a:solidFill>
+                  <a:srgbClr val="20242E"/>
+                </a:solidFill>
+                <a:latin typeface="Inter"/>
+              </a:rPr>
+              <a:t>Heen gaat het altijd via «le» (aan één persoon), terug altijd via «les» (aan de groep). Wie de verkeerde vorm gebruikt, breekt de ketting en die begint opnieuw bij hem.</a:t>
+            </a:r>
+          </a:p>
+        </p:txBody>
+      </p:sp>
+      <p:sp>
+        <p:nvSpPr>
+          <p:cNvPr id="11" name="Tarjeta 0"/>
+          <p:cNvSpPr/>
+          <p:nvPr/>
+        </p:nvSpPr>
+        <p:spPr>
+          <a:xfrm>
+            <a:off x="457200" y="2670048"/>
+            <a:ext cx="2708910" cy="1170432"/>
+          </a:xfrm>
+          <a:prstGeom prst="roundRect">
+            <a:avLst>
+              <a:gd name="adj" fmla="val 6000"/>
+            </a:avLst>
+          </a:prstGeom>
+          <a:solidFill>
+            <a:srgbClr val="FFFFFF"/>
+          </a:solidFill>
+          <a:ln w="12700">
+            <a:solidFill>
+              <a:srgbClr val="E4E3DE"/>
+            </a:solidFill>
+          </a:ln>
+          <a:effectLst/>
+        </p:spPr>
+        <p:style>
+          <a:lnRef idx="1">
+            <a:schemeClr val="accent1"/>
+          </a:lnRef>
+          <a:fillRef idx="3">
+            <a:schemeClr val="accent1"/>
+          </a:fillRef>
+          <a:effectRef idx="2">
+            <a:schemeClr val="accent1"/>
+          </a:effectRef>
+          <a:fontRef idx="minor">
+            <a:schemeClr val="lt1"/>
+          </a:fontRef>
+        </p:style>
+        <p:txBody>
+          <a:bodyPr rtlCol="0" anchor="ctr"/>
+          <a:lstStyle/>
+          <a:p/>
+        </p:txBody>
+      </p:sp>
+      <p:sp>
+        <p:nvSpPr>
+          <p:cNvPr id="12" name="TarjetaTxt 0"/>
+          <p:cNvSpPr txBox="1"/>
+          <p:nvPr/>
+        </p:nvSpPr>
+        <p:spPr>
+          <a:xfrm>
+            <a:off x="548640" y="2724912"/>
+            <a:ext cx="2526030" cy="1060704"/>
+          </a:xfrm>
+          <a:prstGeom prst="rect">
+            <a:avLst/>
+          </a:prstGeom>
+          <a:noFill/>
+        </p:spPr>
+        <p:txBody>
+          <a:bodyPr wrap="square" anchor="t" lIns="45720" rIns="45720" tIns="27432" bIns="27432">
+            <a:normAutofit/>
+          </a:bodyPr>
+          <a:lstStyle/>
+          <a:p>
+            <a:pPr algn="l"/>
+            <a:r>
+              <a:rPr sz="1100" b="1">
+                <a:solidFill>
+                  <a:srgbClr val="5B3E83"/>
+                </a:solidFill>
+                <a:latin typeface="Bricolage Grotesque"/>
+              </a:rPr>
+              <a:t>Favores</a:t>
+            </a:r>
+          </a:p>
+          <a:p>
+            <a:pPr algn="l"/>
+            <a:r>
+              <a:rPr sz="1000">
+                <a:solidFill>
+                  <a:srgbClr val="20242E"/>
+                </a:solidFill>
+                <a:latin typeface="Inter"/>
+              </a:rPr>
+              <a:t>prestar los apuntes de ayer · explicar el ejercicio 4</a:t>
+            </a:r>
+          </a:p>
+        </p:txBody>
+      </p:sp>
+      <p:sp>
+        <p:nvSpPr>
+          <p:cNvPr id="13" name="Tarjeta 1"/>
+          <p:cNvSpPr/>
+          <p:nvPr/>
+        </p:nvSpPr>
+        <p:spPr>
+          <a:xfrm>
+            <a:off x="3312414" y="2670048"/>
+            <a:ext cx="2708910" cy="1170432"/>
+          </a:xfrm>
+          <a:prstGeom prst="roundRect">
+            <a:avLst>
+              <a:gd name="adj" fmla="val 6000"/>
+            </a:avLst>
+          </a:prstGeom>
+          <a:solidFill>
+            <a:srgbClr val="FFFFFF"/>
+          </a:solidFill>
+          <a:ln w="12700">
+            <a:solidFill>
+              <a:srgbClr val="E4E3DE"/>
+            </a:solidFill>
+          </a:ln>
+          <a:effectLst/>
+        </p:spPr>
+        <p:style>
+          <a:lnRef idx="1">
+            <a:schemeClr val="accent1"/>
+          </a:lnRef>
+          <a:fillRef idx="3">
+            <a:schemeClr val="accent1"/>
+          </a:fillRef>
+          <a:effectRef idx="2">
+            <a:schemeClr val="accent1"/>
+          </a:effectRef>
+          <a:fontRef idx="minor">
+            <a:schemeClr val="lt1"/>
+          </a:fontRef>
+        </p:style>
+        <p:txBody>
+          <a:bodyPr rtlCol="0" anchor="ctr"/>
+          <a:lstStyle/>
+          <a:p/>
+        </p:txBody>
+      </p:sp>
+      <p:sp>
+        <p:nvSpPr>
+          <p:cNvPr id="14" name="TarjetaTxt 1"/>
+          <p:cNvSpPr txBox="1"/>
+          <p:nvPr/>
+        </p:nvSpPr>
+        <p:spPr>
+          <a:xfrm>
+            <a:off x="3403854" y="2724912"/>
+            <a:ext cx="2526030" cy="1060704"/>
+          </a:xfrm>
+          <a:prstGeom prst="rect">
+            <a:avLst/>
+          </a:prstGeom>
+          <a:noFill/>
+        </p:spPr>
+        <p:txBody>
+          <a:bodyPr wrap="square" anchor="t" lIns="45720" rIns="45720" tIns="27432" bIns="27432">
+            <a:normAutofit/>
+          </a:bodyPr>
+          <a:lstStyle/>
+          <a:p>
+            <a:pPr algn="l"/>
+            <a:r>
+              <a:rPr sz="1100" b="1">
+                <a:solidFill>
+                  <a:srgbClr val="5B3E83"/>
+                </a:solidFill>
+                <a:latin typeface="Bricolage Grotesque"/>
+              </a:rPr>
+              <a:t>Favores</a:t>
+            </a:r>
+          </a:p>
+          <a:p>
+            <a:pPr algn="l"/>
+            <a:r>
+              <a:rPr sz="1000">
+                <a:solidFill>
+                  <a:srgbClr val="20242E"/>
+                </a:solidFill>
+                <a:latin typeface="Inter"/>
+              </a:rPr>
+              <a:t>cambiar el turno del viernes · traer el cargador mañana</a:t>
+            </a:r>
+          </a:p>
+        </p:txBody>
+      </p:sp>
+      <p:sp>
+        <p:nvSpPr>
+          <p:cNvPr id="15" name="Tarjeta 2"/>
+          <p:cNvSpPr/>
+          <p:nvPr/>
+        </p:nvSpPr>
+        <p:spPr>
+          <a:xfrm>
+            <a:off x="6167628" y="2670048"/>
+            <a:ext cx="2708910" cy="1170432"/>
+          </a:xfrm>
+          <a:prstGeom prst="roundRect">
+            <a:avLst>
+              <a:gd name="adj" fmla="val 6000"/>
+            </a:avLst>
+          </a:prstGeom>
+          <a:solidFill>
+            <a:srgbClr val="FFFFFF"/>
+          </a:solidFill>
+          <a:ln w="12700">
+            <a:solidFill>
+              <a:srgbClr val="E4E3DE"/>
+            </a:solidFill>
+          </a:ln>
+          <a:effectLst/>
+        </p:spPr>
+        <p:style>
+          <a:lnRef idx="1">
+            <a:schemeClr val="accent1"/>
+          </a:lnRef>
+          <a:fillRef idx="3">
+            <a:schemeClr val="accent1"/>
+          </a:fillRef>
+          <a:effectRef idx="2">
+            <a:schemeClr val="accent1"/>
+          </a:effectRef>
+          <a:fontRef idx="minor">
+            <a:schemeClr val="lt1"/>
+          </a:fontRef>
+        </p:style>
+        <p:txBody>
+          <a:bodyPr rtlCol="0" anchor="ctr"/>
+          <a:lstStyle/>
+          <a:p/>
+        </p:txBody>
+      </p:sp>
+      <p:sp>
+        <p:nvSpPr>
+          <p:cNvPr id="16" name="TarjetaTxt 2"/>
+          <p:cNvSpPr txBox="1"/>
+          <p:nvPr/>
+        </p:nvSpPr>
+        <p:spPr>
+          <a:xfrm>
+            <a:off x="6259068" y="2724912"/>
+            <a:ext cx="2526030" cy="1060704"/>
+          </a:xfrm>
+          <a:prstGeom prst="rect">
+            <a:avLst/>
+          </a:prstGeom>
+          <a:noFill/>
+        </p:spPr>
+        <p:txBody>
+          <a:bodyPr wrap="square" anchor="t" lIns="45720" rIns="45720" tIns="27432" bIns="27432">
+            <a:normAutofit/>
+          </a:bodyPr>
+          <a:lstStyle/>
+          <a:p>
+            <a:pPr algn="l"/>
+            <a:r>
+              <a:rPr sz="1100" b="1">
+                <a:solidFill>
+                  <a:srgbClr val="5B3E83"/>
+                </a:solidFill>
+                <a:latin typeface="Bricolage Grotesque"/>
+              </a:rPr>
+              <a:t>Favores</a:t>
+            </a:r>
+          </a:p>
+          <a:p>
+            <a:pPr algn="l"/>
+            <a:r>
+              <a:rPr sz="1000">
+                <a:solidFill>
+                  <a:srgbClr val="20242E"/>
+                </a:solidFill>
+                <a:latin typeface="Inter"/>
+              </a:rPr>
+              <a:t>guardar un sitio en el comedor · avisar cuando llegue el profe</a:t>
+            </a:r>
+          </a:p>
+        </p:txBody>
+      </p:sp>
+      <p:sp>
+        <p:nvSpPr>
+          <p:cNvPr id="17" name="Tarjeta 3"/>
+          <p:cNvSpPr/>
+          <p:nvPr/>
+        </p:nvSpPr>
+        <p:spPr>
+          <a:xfrm>
+            <a:off x="9022842" y="2670048"/>
+            <a:ext cx="2708910" cy="1170432"/>
+          </a:xfrm>
+          <a:prstGeom prst="roundRect">
+            <a:avLst>
+              <a:gd name="adj" fmla="val 6000"/>
+            </a:avLst>
+          </a:prstGeom>
+          <a:solidFill>
+            <a:srgbClr val="FFFFFF"/>
+          </a:solidFill>
+          <a:ln w="12700">
+            <a:solidFill>
+              <a:srgbClr val="E4E3DE"/>
+            </a:solidFill>
+          </a:ln>
+          <a:effectLst/>
+        </p:spPr>
+        <p:style>
+          <a:lnRef idx="1">
+            <a:schemeClr val="accent1"/>
+          </a:lnRef>
+          <a:fillRef idx="3">
+            <a:schemeClr val="accent1"/>
+          </a:fillRef>
+          <a:effectRef idx="2">
+            <a:schemeClr val="accent1"/>
+          </a:effectRef>
+          <a:fontRef idx="minor">
+            <a:schemeClr val="lt1"/>
+          </a:fontRef>
+        </p:style>
+        <p:txBody>
+          <a:bodyPr rtlCol="0" anchor="ctr"/>
+          <a:lstStyle/>
+          <a:p/>
+        </p:txBody>
+      </p:sp>
+      <p:sp>
+        <p:nvSpPr>
+          <p:cNvPr id="18" name="TarjetaTxt 3"/>
+          <p:cNvSpPr txBox="1"/>
+          <p:nvPr/>
+        </p:nvSpPr>
+        <p:spPr>
+          <a:xfrm>
+            <a:off x="9114282" y="2724912"/>
+            <a:ext cx="2526030" cy="1060704"/>
+          </a:xfrm>
+          <a:prstGeom prst="rect">
+            <a:avLst/>
+          </a:prstGeom>
+          <a:noFill/>
+        </p:spPr>
+        <p:txBody>
+          <a:bodyPr wrap="square" anchor="t" lIns="45720" rIns="45720" tIns="27432" bIns="27432">
+            <a:normAutofit/>
+          </a:bodyPr>
+          <a:lstStyle/>
+          <a:p>
+            <a:pPr algn="l"/>
+            <a:r>
+              <a:rPr sz="1100" b="1">
+                <a:solidFill>
+                  <a:srgbClr val="5B3E83"/>
+                </a:solidFill>
+                <a:latin typeface="Bricolage Grotesque"/>
+              </a:rPr>
+              <a:t>Favores</a:t>
+            </a:r>
+          </a:p>
+          <a:p>
+            <a:pPr algn="l"/>
+            <a:r>
+              <a:rPr sz="1000">
+                <a:solidFill>
+                  <a:srgbClr val="20242E"/>
+                </a:solidFill>
+                <a:latin typeface="Inter"/>
+              </a:rPr>
+              <a:t>compartir la foto del examen de prueba · acompañar a secretaría</a:t>
+            </a:r>
+          </a:p>
+        </p:txBody>
+      </p:sp>
+      <p:sp>
+        <p:nvSpPr>
+          <p:cNvPr id="19" name="Tarjeta 4"/>
+          <p:cNvSpPr/>
+          <p:nvPr/>
+        </p:nvSpPr>
+        <p:spPr>
+          <a:xfrm>
+            <a:off x="457200" y="3968496"/>
+            <a:ext cx="2708910" cy="1170432"/>
+          </a:xfrm>
+          <a:prstGeom prst="roundRect">
+            <a:avLst>
+              <a:gd name="adj" fmla="val 6000"/>
+            </a:avLst>
+          </a:prstGeom>
+          <a:solidFill>
+            <a:srgbClr val="FFFFFF"/>
+          </a:solidFill>
+          <a:ln w="12700">
+            <a:solidFill>
+              <a:srgbClr val="E4E3DE"/>
+            </a:solidFill>
+          </a:ln>
+          <a:effectLst/>
+        </p:spPr>
+        <p:style>
+          <a:lnRef idx="1">
+            <a:schemeClr val="accent1"/>
+          </a:lnRef>
+          <a:fillRef idx="3">
+            <a:schemeClr val="accent1"/>
+          </a:fillRef>
+          <a:effectRef idx="2">
+            <a:schemeClr val="accent1"/>
+          </a:effectRef>
+          <a:fontRef idx="minor">
+            <a:schemeClr val="lt1"/>
+          </a:fontRef>
+        </p:style>
+        <p:txBody>
+          <a:bodyPr rtlCol="0" anchor="ctr"/>
+          <a:lstStyle/>
+          <a:p/>
+        </p:txBody>
+      </p:sp>
+      <p:sp>
+        <p:nvSpPr>
+          <p:cNvPr id="20" name="TarjetaTxt 4"/>
+          <p:cNvSpPr txBox="1"/>
+          <p:nvPr/>
+        </p:nvSpPr>
+        <p:spPr>
+          <a:xfrm>
+            <a:off x="548640" y="4023360"/>
+            <a:ext cx="2526030" cy="1060704"/>
+          </a:xfrm>
+          <a:prstGeom prst="rect">
+            <a:avLst/>
+          </a:prstGeom>
+          <a:noFill/>
+        </p:spPr>
+        <p:txBody>
+          <a:bodyPr wrap="square" anchor="t" lIns="45720" rIns="45720" tIns="27432" bIns="27432">
+            <a:normAutofit/>
+          </a:bodyPr>
+          <a:lstStyle/>
+          <a:p>
+            <a:pPr algn="l"/>
+            <a:r>
+              <a:rPr sz="1100" b="1">
+                <a:solidFill>
+                  <a:srgbClr val="5B3E83"/>
+                </a:solidFill>
+                <a:latin typeface="Bricolage Grotesque"/>
+              </a:rPr>
+              <a:t>ida · le</a:t>
+            </a:r>
+          </a:p>
+          <a:p>
+            <a:pPr algn="l"/>
+            <a:r>
+              <a:rPr sz="1000">
+                <a:solidFill>
+                  <a:srgbClr val="20242E"/>
+                </a:solidFill>
+                <a:latin typeface="Inter"/>
+              </a:rPr>
+              <a:t>Le pido a … que me …</a:t>
+            </a:r>
+          </a:p>
+        </p:txBody>
+      </p:sp>
+      <p:sp>
+        <p:nvSpPr>
+          <p:cNvPr id="21" name="Tarjeta 5"/>
+          <p:cNvSpPr/>
+          <p:nvPr/>
+        </p:nvSpPr>
+        <p:spPr>
+          <a:xfrm>
+            <a:off x="3312414" y="3968496"/>
+            <a:ext cx="2708910" cy="1170432"/>
+          </a:xfrm>
+          <a:prstGeom prst="roundRect">
+            <a:avLst>
+              <a:gd name="adj" fmla="val 6000"/>
+            </a:avLst>
+          </a:prstGeom>
+          <a:solidFill>
+            <a:srgbClr val="FFFFFF"/>
+          </a:solidFill>
+          <a:ln w="12700">
+            <a:solidFill>
+              <a:srgbClr val="E4E3DE"/>
+            </a:solidFill>
+          </a:ln>
+          <a:effectLst/>
+        </p:spPr>
+        <p:style>
+          <a:lnRef idx="1">
+            <a:schemeClr val="accent1"/>
+          </a:lnRef>
+          <a:fillRef idx="3">
+            <a:schemeClr val="accent1"/>
+          </a:fillRef>
+          <a:effectRef idx="2">
+            <a:schemeClr val="accent1"/>
+          </a:effectRef>
+          <a:fontRef idx="minor">
+            <a:schemeClr val="lt1"/>
+          </a:fontRef>
+        </p:style>
+        <p:txBody>
+          <a:bodyPr rtlCol="0" anchor="ctr"/>
+          <a:lstStyle/>
+          <a:p/>
+        </p:txBody>
+      </p:sp>
+      <p:sp>
+        <p:nvSpPr>
+          <p:cNvPr id="22" name="TarjetaTxt 5"/>
+          <p:cNvSpPr txBox="1"/>
+          <p:nvPr/>
+        </p:nvSpPr>
+        <p:spPr>
+          <a:xfrm>
+            <a:off x="3403854" y="4023360"/>
+            <a:ext cx="2526030" cy="1060704"/>
+          </a:xfrm>
+          <a:prstGeom prst="rect">
+            <a:avLst/>
+          </a:prstGeom>
+          <a:noFill/>
+        </p:spPr>
+        <p:txBody>
+          <a:bodyPr wrap="square" anchor="t" lIns="45720" rIns="45720" tIns="27432" bIns="27432">
+            <a:normAutofit/>
+          </a:bodyPr>
+          <a:lstStyle/>
+          <a:p>
+            <a:pPr algn="l"/>
+            <a:r>
+              <a:rPr sz="1100" b="1">
+                <a:solidFill>
+                  <a:srgbClr val="5B3E83"/>
+                </a:solidFill>
+                <a:latin typeface="Bricolage Grotesque"/>
+              </a:rPr>
+              <a:t>ida · le</a:t>
+            </a:r>
+          </a:p>
+          <a:p>
+            <a:pPr algn="l"/>
+            <a:r>
+              <a:rPr sz="1000">
+                <a:solidFill>
+                  <a:srgbClr val="20242E"/>
+                </a:solidFill>
+                <a:latin typeface="Inter"/>
+              </a:rPr>
+              <a:t>Le digo a … que …</a:t>
+            </a:r>
+          </a:p>
+        </p:txBody>
+      </p:sp>
+      <p:sp>
+        <p:nvSpPr>
+          <p:cNvPr id="23" name="Tarjeta 6"/>
+          <p:cNvSpPr/>
+          <p:nvPr/>
+        </p:nvSpPr>
+        <p:spPr>
+          <a:xfrm>
+            <a:off x="6167628" y="3968496"/>
+            <a:ext cx="2708910" cy="1170432"/>
+          </a:xfrm>
+          <a:prstGeom prst="roundRect">
+            <a:avLst>
+              <a:gd name="adj" fmla="val 6000"/>
+            </a:avLst>
+          </a:prstGeom>
+          <a:solidFill>
+            <a:srgbClr val="FFFFFF"/>
+          </a:solidFill>
+          <a:ln w="12700">
+            <a:solidFill>
+              <a:srgbClr val="E4E3DE"/>
+            </a:solidFill>
+          </a:ln>
+          <a:effectLst/>
+        </p:spPr>
+        <p:style>
+          <a:lnRef idx="1">
+            <a:schemeClr val="accent1"/>
+          </a:lnRef>
+          <a:fillRef idx="3">
+            <a:schemeClr val="accent1"/>
+          </a:fillRef>
+          <a:effectRef idx="2">
+            <a:schemeClr val="accent1"/>
+          </a:effectRef>
+          <a:fontRef idx="minor">
+            <a:schemeClr val="lt1"/>
+          </a:fontRef>
+        </p:style>
+        <p:txBody>
+          <a:bodyPr rtlCol="0" anchor="ctr"/>
+          <a:lstStyle/>
+          <a:p/>
+        </p:txBody>
+      </p:sp>
+      <p:sp>
+        <p:nvSpPr>
+          <p:cNvPr id="24" name="TarjetaTxt 6"/>
+          <p:cNvSpPr txBox="1"/>
+          <p:nvPr/>
+        </p:nvSpPr>
+        <p:spPr>
+          <a:xfrm>
+            <a:off x="6259068" y="4023360"/>
+            <a:ext cx="2526030" cy="1060704"/>
+          </a:xfrm>
+          <a:prstGeom prst="rect">
+            <a:avLst/>
+          </a:prstGeom>
+          <a:noFill/>
+        </p:spPr>
+        <p:txBody>
+          <a:bodyPr wrap="square" anchor="t" lIns="45720" rIns="45720" tIns="27432" bIns="27432">
+            <a:normAutofit/>
+          </a:bodyPr>
+          <a:lstStyle/>
+          <a:p>
+            <a:pPr algn="l"/>
+            <a:r>
+              <a:rPr sz="1100" b="1">
+                <a:solidFill>
+                  <a:srgbClr val="5B3E83"/>
+                </a:solidFill>
+                <a:latin typeface="Bricolage Grotesque"/>
+              </a:rPr>
+              <a:t>ida · le</a:t>
+            </a:r>
+          </a:p>
+          <a:p>
+            <a:pPr algn="l"/>
+            <a:r>
+              <a:rPr sz="1000">
+                <a:solidFill>
+                  <a:srgbClr val="20242E"/>
+                </a:solidFill>
+                <a:latin typeface="Inter"/>
+              </a:rPr>
+              <a:t>Le pregunto a … si puede …</a:t>
+            </a:r>
+          </a:p>
+        </p:txBody>
+      </p:sp>
+      <p:sp>
+        <p:nvSpPr>
+          <p:cNvPr id="25" name="Tarjeta 7"/>
+          <p:cNvSpPr/>
+          <p:nvPr/>
+        </p:nvSpPr>
+        <p:spPr>
+          <a:xfrm>
+            <a:off x="9022842" y="3968496"/>
+            <a:ext cx="2708910" cy="1170432"/>
+          </a:xfrm>
+          <a:prstGeom prst="roundRect">
+            <a:avLst>
+              <a:gd name="adj" fmla="val 6000"/>
+            </a:avLst>
+          </a:prstGeom>
+          <a:solidFill>
+            <a:srgbClr val="FFFFFF"/>
+          </a:solidFill>
+          <a:ln w="12700">
+            <a:solidFill>
+              <a:srgbClr val="E4E3DE"/>
+            </a:solidFill>
+          </a:ln>
+          <a:effectLst/>
+        </p:spPr>
+        <p:style>
+          <a:lnRef idx="1">
+            <a:schemeClr val="accent1"/>
+          </a:lnRef>
+          <a:fillRef idx="3">
+            <a:schemeClr val="accent1"/>
+          </a:fillRef>
+          <a:effectRef idx="2">
+            <a:schemeClr val="accent1"/>
+          </a:effectRef>
+          <a:fontRef idx="minor">
+            <a:schemeClr val="lt1"/>
+          </a:fontRef>
+        </p:style>
+        <p:txBody>
+          <a:bodyPr rtlCol="0" anchor="ctr"/>
+          <a:lstStyle/>
+          <a:p/>
+        </p:txBody>
+      </p:sp>
+      <p:sp>
+        <p:nvSpPr>
+          <p:cNvPr id="26" name="TarjetaTxt 7"/>
+          <p:cNvSpPr txBox="1"/>
+          <p:nvPr/>
+        </p:nvSpPr>
+        <p:spPr>
+          <a:xfrm>
+            <a:off x="9114282" y="4023360"/>
+            <a:ext cx="2526030" cy="1060704"/>
+          </a:xfrm>
+          <a:prstGeom prst="rect">
+            <a:avLst/>
+          </a:prstGeom>
+          <a:noFill/>
+        </p:spPr>
+        <p:txBody>
+          <a:bodyPr wrap="square" anchor="t" lIns="45720" rIns="45720" tIns="27432" bIns="27432">
+            <a:normAutofit/>
+          </a:bodyPr>
+          <a:lstStyle/>
+          <a:p>
+            <a:pPr algn="l"/>
+            <a:r>
+              <a:rPr sz="1100" b="1">
+                <a:solidFill>
+                  <a:srgbClr val="5B3E83"/>
+                </a:solidFill>
+                <a:latin typeface="Bricolage Grotesque"/>
+              </a:rPr>
+              <a:t>vuelta · les</a:t>
+            </a:r>
+          </a:p>
+          <a:p>
+            <a:pPr algn="l"/>
+            <a:r>
+              <a:rPr sz="1000">
+                <a:solidFill>
+                  <a:srgbClr val="20242E"/>
+                </a:solidFill>
+                <a:latin typeface="Inter"/>
+              </a:rPr>
+              <a:t>Les digo a todos que …</a:t>
+            </a:r>
+          </a:p>
+        </p:txBody>
+      </p:sp>
+      <p:sp>
+        <p:nvSpPr>
+          <p:cNvPr id="27" name="Tarjeta 8"/>
+          <p:cNvSpPr/>
+          <p:nvPr/>
+        </p:nvSpPr>
+        <p:spPr>
+          <a:xfrm>
+            <a:off x="457200" y="5266944"/>
+            <a:ext cx="2708910" cy="1170432"/>
+          </a:xfrm>
+          <a:prstGeom prst="roundRect">
+            <a:avLst>
+              <a:gd name="adj" fmla="val 6000"/>
+            </a:avLst>
+          </a:prstGeom>
+          <a:solidFill>
+            <a:srgbClr val="FFFFFF"/>
+          </a:solidFill>
+          <a:ln w="12700">
+            <a:solidFill>
+              <a:srgbClr val="E4E3DE"/>
+            </a:solidFill>
+          </a:ln>
+          <a:effectLst/>
+        </p:spPr>
+        <p:style>
+          <a:lnRef idx="1">
+            <a:schemeClr val="accent1"/>
+          </a:lnRef>
+          <a:fillRef idx="3">
+            <a:schemeClr val="accent1"/>
+          </a:fillRef>
+          <a:effectRef idx="2">
+            <a:schemeClr val="accent1"/>
+          </a:effectRef>
+          <a:fontRef idx="minor">
+            <a:schemeClr val="lt1"/>
+          </a:fontRef>
+        </p:style>
+        <p:txBody>
+          <a:bodyPr rtlCol="0" anchor="ctr"/>
+          <a:lstStyle/>
+          <a:p/>
+        </p:txBody>
+      </p:sp>
+      <p:sp>
+        <p:nvSpPr>
+          <p:cNvPr id="28" name="TarjetaTxt 8"/>
+          <p:cNvSpPr txBox="1"/>
+          <p:nvPr/>
+        </p:nvSpPr>
+        <p:spPr>
+          <a:xfrm>
+            <a:off x="548640" y="5321808"/>
+            <a:ext cx="2526030" cy="1060704"/>
+          </a:xfrm>
+          <a:prstGeom prst="rect">
+            <a:avLst/>
+          </a:prstGeom>
+          <a:noFill/>
+        </p:spPr>
+        <p:txBody>
+          <a:bodyPr wrap="square" anchor="t" lIns="45720" rIns="45720" tIns="27432" bIns="27432">
+            <a:normAutofit/>
+          </a:bodyPr>
+          <a:lstStyle/>
+          <a:p>
+            <a:pPr algn="l"/>
+            <a:r>
+              <a:rPr sz="1100" b="1">
+                <a:solidFill>
+                  <a:srgbClr val="5B3E83"/>
+                </a:solidFill>
+                <a:latin typeface="Bricolage Grotesque"/>
+              </a:rPr>
+              <a:t>vuelta · les</a:t>
+            </a:r>
+          </a:p>
+          <a:p>
+            <a:pPr algn="l"/>
+            <a:r>
+              <a:rPr sz="1000">
+                <a:solidFill>
+                  <a:srgbClr val="20242E"/>
+                </a:solidFill>
+                <a:latin typeface="Inter"/>
+              </a:rPr>
+              <a:t>Les explico que …</a:t>
+            </a:r>
+          </a:p>
+        </p:txBody>
+      </p:sp>
+      <p:sp>
+        <p:nvSpPr>
+          <p:cNvPr id="29" name="Tarjeta 9"/>
+          <p:cNvSpPr/>
+          <p:nvPr/>
+        </p:nvSpPr>
+        <p:spPr>
+          <a:xfrm>
+            <a:off x="3312414" y="5266944"/>
+            <a:ext cx="2708910" cy="1170432"/>
+          </a:xfrm>
+          <a:prstGeom prst="roundRect">
+            <a:avLst>
+              <a:gd name="adj" fmla="val 6000"/>
+            </a:avLst>
+          </a:prstGeom>
+          <a:solidFill>
+            <a:srgbClr val="FFFFFF"/>
+          </a:solidFill>
+          <a:ln w="12700">
+            <a:solidFill>
+              <a:srgbClr val="E4E3DE"/>
+            </a:solidFill>
+          </a:ln>
+          <a:effectLst/>
+        </p:spPr>
+        <p:style>
+          <a:lnRef idx="1">
+            <a:schemeClr val="accent1"/>
+          </a:lnRef>
+          <a:fillRef idx="3">
+            <a:schemeClr val="accent1"/>
+          </a:fillRef>
+          <a:effectRef idx="2">
+            <a:schemeClr val="accent1"/>
+          </a:effectRef>
+          <a:fontRef idx="minor">
+            <a:schemeClr val="lt1"/>
+          </a:fontRef>
+        </p:style>
+        <p:txBody>
+          <a:bodyPr rtlCol="0" anchor="ctr"/>
+          <a:lstStyle/>
+          <a:p/>
+        </p:txBody>
+      </p:sp>
+      <p:sp>
+        <p:nvSpPr>
+          <p:cNvPr id="30" name="TarjetaTxt 9"/>
+          <p:cNvSpPr txBox="1"/>
+          <p:nvPr/>
+        </p:nvSpPr>
+        <p:spPr>
+          <a:xfrm>
+            <a:off x="3403854" y="5321808"/>
+            <a:ext cx="2526030" cy="1060704"/>
+          </a:xfrm>
+          <a:prstGeom prst="rect">
+            <a:avLst/>
+          </a:prstGeom>
+          <a:noFill/>
+        </p:spPr>
+        <p:txBody>
+          <a:bodyPr wrap="square" anchor="t" lIns="45720" rIns="45720" tIns="27432" bIns="27432">
+            <a:normAutofit/>
+          </a:bodyPr>
+          <a:lstStyle/>
+          <a:p>
+            <a:pPr algn="l"/>
+            <a:r>
+              <a:rPr sz="1100" b="1">
+                <a:solidFill>
+                  <a:srgbClr val="5B3E83"/>
+                </a:solidFill>
+                <a:latin typeface="Bricolage Grotesque"/>
+              </a:rPr>
+              <a:t>vuelta · les</a:t>
+            </a:r>
+          </a:p>
+          <a:p>
+            <a:pPr algn="l"/>
+            <a:r>
+              <a:rPr sz="1000">
+                <a:solidFill>
+                  <a:srgbClr val="20242E"/>
+                </a:solidFill>
+                <a:latin typeface="Inter"/>
+              </a:rPr>
+              <a:t>Les cuento lo que ha pasado con el favor.</a:t>
+            </a:r>
+          </a:p>
+        </p:txBody>
+      </p:sp>
+      <p:sp>
+        <p:nvSpPr>
+          <p:cNvPr id="31" name="Tarjeta 10"/>
+          <p:cNvSpPr/>
+          <p:nvPr/>
+        </p:nvSpPr>
+        <p:spPr>
+          <a:xfrm>
+            <a:off x="6167628" y="5266944"/>
+            <a:ext cx="2708910" cy="1170432"/>
+          </a:xfrm>
+          <a:prstGeom prst="roundRect">
+            <a:avLst>
+              <a:gd name="adj" fmla="val 6000"/>
+            </a:avLst>
+          </a:prstGeom>
+          <a:solidFill>
+            <a:srgbClr val="FFFFFF"/>
+          </a:solidFill>
+          <a:ln w="12700">
+            <a:solidFill>
+              <a:srgbClr val="E4E3DE"/>
+            </a:solidFill>
+          </a:ln>
+          <a:effectLst/>
+        </p:spPr>
+        <p:style>
+          <a:lnRef idx="1">
+            <a:schemeClr val="accent1"/>
+          </a:lnRef>
+          <a:fillRef idx="3">
+            <a:schemeClr val="accent1"/>
+          </a:fillRef>
+          <a:effectRef idx="2">
+            <a:schemeClr val="accent1"/>
+          </a:effectRef>
+          <a:fontRef idx="minor">
+            <a:schemeClr val="lt1"/>
+          </a:fontRef>
+        </p:style>
+        <p:txBody>
+          <a:bodyPr rtlCol="0" anchor="ctr"/>
+          <a:lstStyle/>
+          <a:p/>
+        </p:txBody>
+      </p:sp>
+      <p:sp>
+        <p:nvSpPr>
+          <p:cNvPr id="32" name="TarjetaTxt 10"/>
+          <p:cNvSpPr txBox="1"/>
+          <p:nvPr/>
+        </p:nvSpPr>
+        <p:spPr>
+          <a:xfrm>
+            <a:off x="6259068" y="5321808"/>
+            <a:ext cx="2526030" cy="1060704"/>
+          </a:xfrm>
+          <a:prstGeom prst="rect">
+            <a:avLst/>
+          </a:prstGeom>
+          <a:noFill/>
+        </p:spPr>
+        <p:txBody>
+          <a:bodyPr wrap="square" anchor="t" lIns="45720" rIns="45720" tIns="27432" bIns="27432">
+            <a:normAutofit/>
+          </a:bodyPr>
+          <a:lstStyle/>
+          <a:p>
+            <a:pPr algn="l"/>
+            <a:r>
+              <a:rPr sz="1100" b="1">
+                <a:solidFill>
+                  <a:srgbClr val="5B3E83"/>
+                </a:solidFill>
+                <a:latin typeface="Bricolage Grotesque"/>
+              </a:rPr>
+              <a:t>La trampa</a:t>
+            </a:r>
+          </a:p>
+          <a:p>
+            <a:pPr algn="l"/>
+            <a:r>
+              <a:rPr sz="1000">
+                <a:solidFill>
+                  <a:srgbClr val="20242E"/>
+                </a:solidFill>
+                <a:latin typeface="Inter"/>
+              </a:rPr>
+              <a:t>Si el favor va a dos personas, ya no es «le» sino «les». Eso pasa al menos una vez por ronda.</a:t>
             </a:r>
           </a:p>
         </p:txBody>
